--- a/2 курс/1 семестр/Управление данными/Курсовой проект/Презентация для защиты.pptx
+++ b/2 курс/1 семестр/Управление данными/Курсовой проект/Презентация для защиты.pptx
@@ -6,7 +6,7 @@
     <p:sldMasterId id="2147483699" r:id="rId2"/>
   </p:sldMasterIdLst>
   <p:notesMasterIdLst>
-    <p:notesMasterId r:id="rId22"/>
+    <p:notesMasterId r:id="rId24"/>
   </p:notesMasterIdLst>
   <p:sldIdLst>
     <p:sldId id="258" r:id="rId3"/>
@@ -18,27 +18,24 @@
     <p:sldId id="265" r:id="rId9"/>
     <p:sldId id="266" r:id="rId10"/>
     <p:sldId id="267" r:id="rId11"/>
-    <p:sldId id="268" r:id="rId12"/>
-    <p:sldId id="269" r:id="rId13"/>
-    <p:sldId id="270" r:id="rId14"/>
-    <p:sldId id="271" r:id="rId15"/>
-    <p:sldId id="273" r:id="rId16"/>
-    <p:sldId id="274" r:id="rId17"/>
-    <p:sldId id="278" r:id="rId18"/>
-    <p:sldId id="275" r:id="rId19"/>
-    <p:sldId id="277" r:id="rId20"/>
-    <p:sldId id="276" r:id="rId21"/>
+    <p:sldId id="279" r:id="rId12"/>
+    <p:sldId id="268" r:id="rId13"/>
+    <p:sldId id="269" r:id="rId14"/>
+    <p:sldId id="270" r:id="rId15"/>
+    <p:sldId id="271" r:id="rId16"/>
+    <p:sldId id="273" r:id="rId17"/>
+    <p:sldId id="274" r:id="rId18"/>
+    <p:sldId id="278" r:id="rId19"/>
+    <p:sldId id="275" r:id="rId20"/>
+    <p:sldId id="277" r:id="rId21"/>
+    <p:sldId id="280" r:id="rId22"/>
+    <p:sldId id="276" r:id="rId23"/>
   </p:sldIdLst>
   <p:sldSz cx="9144000" cy="5143500" type="screen16x9"/>
   <p:notesSz cx="6858000" cy="9144000"/>
   <p:embeddedFontLst>
     <p:embeddedFont>
       <p:font typeface="Manrope" panose="020B0604020202020204" charset="0"/>
-      <p:regular r:id="rId23"/>
-      <p:bold r:id="rId24"/>
-    </p:embeddedFont>
-    <p:embeddedFont>
-      <p:font typeface="Manrope Medium" panose="020B0604020202020204" charset="0"/>
       <p:regular r:id="rId25"/>
       <p:bold r:id="rId26"/>
     </p:embeddedFont>
@@ -841,6 +838,133 @@
   <p:cSld>
     <p:spTree>
       <p:nvGrpSpPr>
+        <p:cNvPr id="1" name="Shape 349">
+          <a:extLst>
+            <a:ext uri="{FF2B5EF4-FFF2-40B4-BE49-F238E27FC236}">
+              <a16:creationId xmlns:a16="http://schemas.microsoft.com/office/drawing/2014/main" id="{10EB4F50-E794-1902-632A-2976BB329341}"/>
+            </a:ext>
+          </a:extLst>
+        </p:cNvPr>
+        <p:cNvGrpSpPr/>
+        <p:nvPr/>
+      </p:nvGrpSpPr>
+      <p:grpSpPr>
+        <a:xfrm>
+          <a:off x="0" y="0"/>
+          <a:ext cx="0" cy="0"/>
+          <a:chOff x="0" y="0"/>
+          <a:chExt cx="0" cy="0"/>
+        </a:xfrm>
+      </p:grpSpPr>
+      <p:sp>
+        <p:nvSpPr>
+          <p:cNvPr id="350" name="Google Shape;350;g260a8deabce_0_85:notes">
+            <a:extLst>
+              <a:ext uri="{FF2B5EF4-FFF2-40B4-BE49-F238E27FC236}">
+                <a16:creationId xmlns:a16="http://schemas.microsoft.com/office/drawing/2014/main" id="{046B9FA2-F99E-E7B5-7C15-855B2E29D070}"/>
+              </a:ext>
+            </a:extLst>
+          </p:cNvPr>
+          <p:cNvSpPr txBox="1">
+            <a:spLocks noGrp="1"/>
+          </p:cNvSpPr>
+          <p:nvPr>
+            <p:ph type="body" idx="1"/>
+          </p:nvPr>
+        </p:nvSpPr>
+        <p:spPr>
+          <a:xfrm>
+            <a:off x="685800" y="4343400"/>
+            <a:ext cx="5486400" cy="4114800"/>
+          </a:xfrm>
+          <a:prstGeom prst="rect">
+            <a:avLst/>
+          </a:prstGeom>
+        </p:spPr>
+        <p:txBody>
+          <a:bodyPr spcFirstLastPara="1" wrap="square" lIns="91425" tIns="91425" rIns="91425" bIns="91425" anchor="t" anchorCtr="0">
+            <a:noAutofit/>
+          </a:bodyPr>
+          <a:lstStyle/>
+          <a:p>
+            <a:pPr marL="0" lvl="0" indent="0" algn="l" rtl="0">
+              <a:spcBef>
+                <a:spcPts val="0"/>
+              </a:spcBef>
+              <a:spcAft>
+                <a:spcPts val="0"/>
+              </a:spcAft>
+              <a:buNone/>
+            </a:pPr>
+            <a:endParaRPr/>
+          </a:p>
+        </p:txBody>
+      </p:sp>
+      <p:sp>
+        <p:nvSpPr>
+          <p:cNvPr id="351" name="Google Shape;351;g260a8deabce_0_85:notes">
+            <a:extLst>
+              <a:ext uri="{FF2B5EF4-FFF2-40B4-BE49-F238E27FC236}">
+                <a16:creationId xmlns:a16="http://schemas.microsoft.com/office/drawing/2014/main" id="{0ED836BA-0354-E6EF-658F-1A229BD5A447}"/>
+              </a:ext>
+            </a:extLst>
+          </p:cNvPr>
+          <p:cNvSpPr>
+            <a:spLocks noGrp="1" noRot="1" noChangeAspect="1"/>
+          </p:cNvSpPr>
+          <p:nvPr>
+            <p:ph type="sldImg" idx="2"/>
+          </p:nvPr>
+        </p:nvSpPr>
+        <p:spPr>
+          <a:xfrm>
+            <a:off x="381000" y="685800"/>
+            <a:ext cx="6096000" cy="3429000"/>
+          </a:xfrm>
+          <a:custGeom>
+            <a:avLst/>
+            <a:gdLst/>
+            <a:ahLst/>
+            <a:cxnLst/>
+            <a:rect l="l" t="t" r="r" b="b"/>
+            <a:pathLst>
+              <a:path w="120000" h="120000" extrusionOk="0">
+                <a:moveTo>
+                  <a:pt x="0" y="0"/>
+                </a:moveTo>
+                <a:lnTo>
+                  <a:pt x="120000" y="0"/>
+                </a:lnTo>
+                <a:lnTo>
+                  <a:pt x="120000" y="120000"/>
+                </a:lnTo>
+                <a:lnTo>
+                  <a:pt x="0" y="120000"/>
+                </a:lnTo>
+                <a:close/>
+              </a:path>
+            </a:pathLst>
+          </a:custGeom>
+        </p:spPr>
+      </p:sp>
+    </p:spTree>
+    <p:extLst>
+      <p:ext uri="{BB962C8B-B14F-4D97-AF65-F5344CB8AC3E}">
+        <p14:creationId xmlns:p14="http://schemas.microsoft.com/office/powerpoint/2010/main" val="2255863033"/>
+      </p:ext>
+    </p:extLst>
+  </p:cSld>
+  <p:clrMapOvr>
+    <a:masterClrMapping/>
+  </p:clrMapOvr>
+</p:notes>
+</file>
+
+<file path=ppt/notesSlides/notesSlide11.xml><?xml version="1.0" encoding="utf-8"?>
+<p:notes xmlns:a="http://schemas.openxmlformats.org/drawingml/2006/main" xmlns:r="http://schemas.openxmlformats.org/officeDocument/2006/relationships" xmlns:p="http://schemas.openxmlformats.org/presentationml/2006/main" showMasterSp="0" showMasterPhAnim="0">
+  <p:cSld>
+    <p:spTree>
+      <p:nvGrpSpPr>
         <p:cNvPr id="1" name="Shape 360"/>
         <p:cNvGrpSpPr/>
         <p:nvPr/>
@@ -940,7 +1064,7 @@
 </p:notes>
 </file>
 
-<file path=ppt/notesSlides/notesSlide11.xml><?xml version="1.0" encoding="utf-8"?>
+<file path=ppt/notesSlides/notesSlide12.xml><?xml version="1.0" encoding="utf-8"?>
 <p:notes xmlns:a="http://schemas.openxmlformats.org/drawingml/2006/main" xmlns:r="http://schemas.openxmlformats.org/officeDocument/2006/relationships" xmlns:p="http://schemas.openxmlformats.org/presentationml/2006/main" showMasterSp="0" showMasterPhAnim="0">
   <p:cSld>
     <p:spTree>
@@ -1044,7 +1168,7 @@
 </p:notes>
 </file>
 
-<file path=ppt/notesSlides/notesSlide12.xml><?xml version="1.0" encoding="utf-8"?>
+<file path=ppt/notesSlides/notesSlide13.xml><?xml version="1.0" encoding="utf-8"?>
 <p:notes xmlns:a="http://schemas.openxmlformats.org/drawingml/2006/main" xmlns:r="http://schemas.openxmlformats.org/officeDocument/2006/relationships" xmlns:p="http://schemas.openxmlformats.org/presentationml/2006/main" showMasterSp="0" showMasterPhAnim="0">
   <p:cSld>
     <p:spTree>
@@ -1148,7 +1272,7 @@
 </p:notes>
 </file>
 
-<file path=ppt/notesSlides/notesSlide13.xml><?xml version="1.0" encoding="utf-8"?>
+<file path=ppt/notesSlides/notesSlide14.xml><?xml version="1.0" encoding="utf-8"?>
 <p:notes xmlns:a="http://schemas.openxmlformats.org/drawingml/2006/main" xmlns:r="http://schemas.openxmlformats.org/officeDocument/2006/relationships" xmlns:p="http://schemas.openxmlformats.org/presentationml/2006/main" showMasterSp="0" showMasterPhAnim="0">
   <p:cSld>
     <p:spTree>
@@ -1252,7 +1376,7 @@
 </p:notes>
 </file>
 
-<file path=ppt/notesSlides/notesSlide14.xml><?xml version="1.0" encoding="utf-8"?>
+<file path=ppt/notesSlides/notesSlide15.xml><?xml version="1.0" encoding="utf-8"?>
 <p:notes xmlns:a="http://schemas.openxmlformats.org/drawingml/2006/main" xmlns:r="http://schemas.openxmlformats.org/officeDocument/2006/relationships" xmlns:p="http://schemas.openxmlformats.org/presentationml/2006/main">
   <p:cSld>
     <p:spTree>
@@ -8734,25 +8858,10 @@
           <a:lstStyle/>
           <a:p>
             <a:r>
-              <a:rPr lang="ru-RU" sz="3600" dirty="0"/>
-              <a:t>Курсовой </a:t>
+              <a:rPr lang="ru-RU" sz="3600" b="0" dirty="0"/>
+              <a:t>Курсовой проект Разработка структуры базы данных для информационной системы «Деканат»</a:t>
             </a:r>
-            <a:r>
-              <a:rPr lang="ru-RU" sz="3600"/>
-              <a:t>проект </a:t>
-            </a:r>
-            <a:r>
-              <a:rPr lang="ru-RU" sz="3200" b="0"/>
-              <a:t>Разработка </a:t>
-            </a:r>
-            <a:r>
-              <a:rPr lang="ru-RU" sz="3200" b="0" dirty="0"/>
-              <a:t>структуры базы данных для информационной системы «Поликлиника»</a:t>
-            </a:r>
-            <a:br>
-              <a:rPr lang="ru-RU" dirty="0"/>
-            </a:br>
-            <a:endParaRPr dirty="0"/>
+            <a:endParaRPr b="0" dirty="0"/>
           </a:p>
         </p:txBody>
       </p:sp>
@@ -8781,33 +8890,17 @@
           </a:bodyPr>
           <a:lstStyle/>
           <a:p>
-            <a:pPr marL="0" lvl="0" indent="0" algn="l" rtl="0">
-              <a:spcBef>
-                <a:spcPts val="300"/>
-              </a:spcBef>
-              <a:spcAft>
-                <a:spcPts val="0"/>
-              </a:spcAft>
-              <a:buNone/>
-            </a:pPr>
+            <a:pPr lvl="0"/>
             <a:r>
               <a:rPr lang="ru-RU" dirty="0"/>
-              <a:t>Автор: Голубева Руслана,</a:t>
+              <a:t>Автор: Возисов Иван,</a:t>
             </a:r>
           </a:p>
           <a:p>
-            <a:pPr marL="0" lvl="0" indent="0" algn="l" rtl="0">
-              <a:spcBef>
-                <a:spcPts val="300"/>
-              </a:spcBef>
-              <a:spcAft>
-                <a:spcPts val="0"/>
-              </a:spcAft>
-              <a:buNone/>
-            </a:pPr>
+            <a:pPr lvl="0"/>
             <a:r>
               <a:rPr lang="ru-RU" dirty="0"/>
-              <a:t>студентка группы ЗИСТуд-224</a:t>
+              <a:t>студент группы ЗИСТуд-124</a:t>
             </a:r>
           </a:p>
         </p:txBody>
@@ -8821,6 +8914,164 @@
 </file>
 
 <file path=ppt/slides/slide10.xml><?xml version="1.0" encoding="utf-8"?>
+<p:sld xmlns:a="http://schemas.openxmlformats.org/drawingml/2006/main" xmlns:r="http://schemas.openxmlformats.org/officeDocument/2006/relationships" xmlns:p="http://schemas.openxmlformats.org/presentationml/2006/main">
+  <p:cSld>
+    <p:bg>
+      <p:bgPr>
+        <a:solidFill>
+          <a:schemeClr val="lt1"/>
+        </a:solidFill>
+        <a:effectLst/>
+      </p:bgPr>
+    </p:bg>
+    <p:spTree>
+      <p:nvGrpSpPr>
+        <p:cNvPr id="1" name="Shape 352">
+          <a:extLst>
+            <a:ext uri="{FF2B5EF4-FFF2-40B4-BE49-F238E27FC236}">
+              <a16:creationId xmlns:a16="http://schemas.microsoft.com/office/drawing/2014/main" id="{917CA269-22CA-483B-5EA6-3513804547F5}"/>
+            </a:ext>
+          </a:extLst>
+        </p:cNvPr>
+        <p:cNvGrpSpPr/>
+        <p:nvPr/>
+      </p:nvGrpSpPr>
+      <p:grpSpPr>
+        <a:xfrm>
+          <a:off x="0" y="0"/>
+          <a:ext cx="0" cy="0"/>
+          <a:chOff x="0" y="0"/>
+          <a:chExt cx="0" cy="0"/>
+        </a:xfrm>
+      </p:grpSpPr>
+      <p:sp>
+        <p:nvSpPr>
+          <p:cNvPr id="353" name="Google Shape;353;p66">
+            <a:extLst>
+              <a:ext uri="{FF2B5EF4-FFF2-40B4-BE49-F238E27FC236}">
+                <a16:creationId xmlns:a16="http://schemas.microsoft.com/office/drawing/2014/main" id="{AB0CBA64-82A2-1A5F-3D50-00731C53FB4C}"/>
+              </a:ext>
+            </a:extLst>
+          </p:cNvPr>
+          <p:cNvSpPr txBox="1">
+            <a:spLocks noGrp="1"/>
+          </p:cNvSpPr>
+          <p:nvPr>
+            <p:ph type="title"/>
+          </p:nvPr>
+        </p:nvSpPr>
+        <p:spPr>
+          <a:prstGeom prst="rect">
+            <a:avLst/>
+          </a:prstGeom>
+        </p:spPr>
+        <p:txBody>
+          <a:bodyPr spcFirstLastPara="1" wrap="square" lIns="0" tIns="91425" rIns="91425" bIns="91425" anchor="ctr" anchorCtr="0">
+            <a:noAutofit/>
+          </a:bodyPr>
+          <a:lstStyle/>
+          <a:p>
+            <a:pPr lvl="0"/>
+            <a:r>
+              <a:rPr lang="ru-RU" sz="2000" dirty="0"/>
+              <a:t>Таблица </a:t>
+            </a:r>
+            <a:r>
+              <a:rPr lang="en-US" sz="2000" dirty="0" err="1"/>
+              <a:t>session_grades</a:t>
+            </a:r>
+            <a:endParaRPr sz="2000" dirty="0"/>
+          </a:p>
+        </p:txBody>
+      </p:sp>
+      <p:pic>
+        <p:nvPicPr>
+          <p:cNvPr id="4" name="Рисунок 3">
+            <a:extLst>
+              <a:ext uri="{FF2B5EF4-FFF2-40B4-BE49-F238E27FC236}">
+                <a16:creationId xmlns:a16="http://schemas.microsoft.com/office/drawing/2014/main" id="{BB85B67D-0026-475B-EDE1-81C39BE73DBC}"/>
+              </a:ext>
+            </a:extLst>
+          </p:cNvPr>
+          <p:cNvPicPr>
+            <a:picLocks noChangeAspect="1"/>
+          </p:cNvPicPr>
+          <p:nvPr/>
+        </p:nvPicPr>
+        <p:blipFill>
+          <a:blip r:embed="rId3"/>
+          <a:stretch>
+            <a:fillRect/>
+          </a:stretch>
+        </p:blipFill>
+        <p:spPr>
+          <a:xfrm>
+            <a:off x="1931549" y="929625"/>
+            <a:ext cx="5280901" cy="2083224"/>
+          </a:xfrm>
+          <a:prstGeom prst="rect">
+            <a:avLst/>
+          </a:prstGeom>
+          <a:ln>
+            <a:solidFill>
+              <a:schemeClr val="bg1">
+                <a:lumMod val="10000"/>
+              </a:schemeClr>
+            </a:solidFill>
+          </a:ln>
+        </p:spPr>
+      </p:pic>
+      <p:pic>
+        <p:nvPicPr>
+          <p:cNvPr id="5" name="Рисунок 4">
+            <a:extLst>
+              <a:ext uri="{FF2B5EF4-FFF2-40B4-BE49-F238E27FC236}">
+                <a16:creationId xmlns:a16="http://schemas.microsoft.com/office/drawing/2014/main" id="{DDE8ADF5-832C-16EB-5262-E50BFCAFA4E0}"/>
+              </a:ext>
+            </a:extLst>
+          </p:cNvPr>
+          <p:cNvPicPr>
+            <a:picLocks noChangeAspect="1"/>
+          </p:cNvPicPr>
+          <p:nvPr/>
+        </p:nvPicPr>
+        <p:blipFill>
+          <a:blip r:embed="rId4"/>
+          <a:stretch>
+            <a:fillRect/>
+          </a:stretch>
+        </p:blipFill>
+        <p:spPr>
+          <a:xfrm>
+            <a:off x="2445033" y="3081750"/>
+            <a:ext cx="4253934" cy="1763475"/>
+          </a:xfrm>
+          <a:prstGeom prst="rect">
+            <a:avLst/>
+          </a:prstGeom>
+          <a:ln>
+            <a:solidFill>
+              <a:schemeClr val="bg1">
+                <a:lumMod val="10000"/>
+              </a:schemeClr>
+            </a:solidFill>
+          </a:ln>
+        </p:spPr>
+      </p:pic>
+    </p:spTree>
+    <p:extLst>
+      <p:ext uri="{BB962C8B-B14F-4D97-AF65-F5344CB8AC3E}">
+        <p14:creationId xmlns:p14="http://schemas.microsoft.com/office/powerpoint/2010/main" val="1759397647"/>
+      </p:ext>
+    </p:extLst>
+  </p:cSld>
+  <p:clrMapOvr>
+    <a:masterClrMapping/>
+  </p:clrMapOvr>
+</p:sld>
+</file>
+
+<file path=ppt/slides/slide11.xml><?xml version="1.0" encoding="utf-8"?>
 <p:sld xmlns:a="http://schemas.openxmlformats.org/drawingml/2006/main" xmlns:r="http://schemas.openxmlformats.org/officeDocument/2006/relationships" xmlns:p="http://schemas.openxmlformats.org/presentationml/2006/main">
   <p:cSld>
     <p:bg>
@@ -8877,7 +9128,7 @@
             </a:r>
             <a:r>
               <a:rPr lang="en-US" sz="2400" dirty="0" err="1"/>
-              <a:t>HasActiveDispensary</a:t>
+              <a:t>avg_student_rate</a:t>
             </a:r>
             <a:endParaRPr sz="2400" dirty="0"/>
           </a:p>
@@ -8885,10 +9136,10 @@
       </p:sp>
       <p:pic>
         <p:nvPicPr>
-          <p:cNvPr id="8" name="Рисунок 7">
+          <p:cNvPr id="2" name="Рисунок 1">
             <a:extLst>
               <a:ext uri="{FF2B5EF4-FFF2-40B4-BE49-F238E27FC236}">
-                <a16:creationId xmlns:a16="http://schemas.microsoft.com/office/drawing/2014/main" id="{B0051798-06B8-AA70-477C-F223654FCC96}"/>
+                <a16:creationId xmlns:a16="http://schemas.microsoft.com/office/drawing/2014/main" id="{D3BFBFE7-1663-019C-EB15-B620B0794F45}"/>
               </a:ext>
             </a:extLst>
           </p:cNvPr>
@@ -8905,52 +9156,74 @@
         </p:blipFill>
         <p:spPr>
           <a:xfrm>
-            <a:off x="1037840" y="1024128"/>
-            <a:ext cx="2412495" cy="4058668"/>
+            <a:off x="452625" y="1706880"/>
+            <a:ext cx="3598645" cy="2312871"/>
           </a:xfrm>
           <a:prstGeom prst="rect">
             <a:avLst/>
           </a:prstGeom>
           <a:ln>
             <a:solidFill>
-              <a:srgbClr val="000000"/>
+              <a:schemeClr val="bg1">
+                <a:lumMod val="10000"/>
+              </a:schemeClr>
             </a:solidFill>
           </a:ln>
         </p:spPr>
       </p:pic>
       <p:pic>
         <p:nvPicPr>
-          <p:cNvPr id="10" name="Рисунок 9">
+          <p:cNvPr id="5" name="Рисунок 1">
             <a:extLst>
               <a:ext uri="{FF2B5EF4-FFF2-40B4-BE49-F238E27FC236}">
-                <a16:creationId xmlns:a16="http://schemas.microsoft.com/office/drawing/2014/main" id="{D4010C27-FCD2-ED7D-6319-D0A3B8EC2FC1}"/>
+                <a16:creationId xmlns:a16="http://schemas.microsoft.com/office/drawing/2014/main" id="{258220E2-7F24-EC61-92B6-176A445F6979}"/>
               </a:ext>
             </a:extLst>
           </p:cNvPr>
           <p:cNvPicPr>
-            <a:picLocks noChangeAspect="1"/>
+            <a:picLocks noChangeAspect="1" noChangeArrowheads="1"/>
           </p:cNvPicPr>
           <p:nvPr/>
         </p:nvPicPr>
         <p:blipFill>
-          <a:blip r:embed="rId4"/>
+          <a:blip r:embed="rId4">
+            <a:extLst>
+              <a:ext uri="{28A0092B-C50C-407E-A947-70E740481C1C}">
+                <a14:useLocalDpi xmlns:a14="http://schemas.microsoft.com/office/drawing/2010/main" val="0"/>
+              </a:ext>
+            </a:extLst>
+          </a:blip>
+          <a:srcRect/>
           <a:stretch>
             <a:fillRect/>
           </a:stretch>
         </p:blipFill>
-        <p:spPr>
+        <p:spPr bwMode="auto">
           <a:xfrm>
-            <a:off x="4069323" y="1024128"/>
-            <a:ext cx="4419119" cy="4058668"/>
+            <a:off x="4282440" y="2082690"/>
+            <a:ext cx="4861560" cy="1339563"/>
           </a:xfrm>
           <a:prstGeom prst="rect">
             <a:avLst/>
           </a:prstGeom>
-          <a:ln>
+          <a:noFill/>
+          <a:ln w="9525">
             <a:solidFill>
               <a:srgbClr val="000000"/>
             </a:solidFill>
+            <a:miter lim="800000"/>
+            <a:headEnd/>
+            <a:tailEnd/>
           </a:ln>
+          <a:extLst>
+            <a:ext uri="{909E8E84-426E-40DD-AFC4-6F175D3DCCD1}">
+              <a14:hiddenFill xmlns:a14="http://schemas.microsoft.com/office/drawing/2010/main">
+                <a:solidFill>
+                  <a:srgbClr val="FFFFFF"/>
+                </a:solidFill>
+              </a14:hiddenFill>
+            </a:ext>
+          </a:extLst>
         </p:spPr>
       </p:pic>
     </p:spTree>
@@ -8961,7 +9234,7 @@
 </p:sld>
 </file>
 
-<file path=ppt/slides/slide11.xml><?xml version="1.0" encoding="utf-8"?>
+<file path=ppt/slides/slide12.xml><?xml version="1.0" encoding="utf-8"?>
 <p:sld xmlns:a="http://schemas.openxmlformats.org/drawingml/2006/main" xmlns:r="http://schemas.openxmlformats.org/officeDocument/2006/relationships" xmlns:p="http://schemas.openxmlformats.org/presentationml/2006/main">
   <p:cSld>
     <p:bg>
@@ -9018,7 +9291,7 @@
             </a:r>
             <a:r>
               <a:rPr lang="en-US" sz="2400" dirty="0" err="1"/>
-              <a:t>CalculateDoctorExperience</a:t>
+              <a:t>check_session_close</a:t>
             </a:r>
             <a:endParaRPr sz="2400" dirty="0"/>
           </a:p>
@@ -9026,10 +9299,10 @@
       </p:sp>
       <p:pic>
         <p:nvPicPr>
-          <p:cNvPr id="4" name="Рисунок 3">
+          <p:cNvPr id="2" name="Рисунок 1">
             <a:extLst>
               <a:ext uri="{FF2B5EF4-FFF2-40B4-BE49-F238E27FC236}">
-                <a16:creationId xmlns:a16="http://schemas.microsoft.com/office/drawing/2014/main" id="{B96E5CFF-C885-C032-EC3E-8776084B8A7E}"/>
+                <a16:creationId xmlns:a16="http://schemas.microsoft.com/office/drawing/2014/main" id="{D1A8E0A6-A9A9-5E2B-4FA4-F70F8391D4AE}"/>
               </a:ext>
             </a:extLst>
           </p:cNvPr>
@@ -9046,52 +9319,67 @@
         </p:blipFill>
         <p:spPr>
           <a:xfrm>
-            <a:off x="184401" y="929625"/>
-            <a:ext cx="4659419" cy="4058412"/>
+            <a:off x="452624" y="1036320"/>
+            <a:ext cx="3719239" cy="3696328"/>
           </a:xfrm>
           <a:prstGeom prst="rect">
             <a:avLst/>
           </a:prstGeom>
-          <a:ln>
-            <a:solidFill>
-              <a:srgbClr val="000000"/>
-            </a:solidFill>
-          </a:ln>
         </p:spPr>
       </p:pic>
       <p:pic>
         <p:nvPicPr>
-          <p:cNvPr id="6" name="Рисунок 5">
+          <p:cNvPr id="3" name="Рисунок 1">
             <a:extLst>
               <a:ext uri="{FF2B5EF4-FFF2-40B4-BE49-F238E27FC236}">
-                <a16:creationId xmlns:a16="http://schemas.microsoft.com/office/drawing/2014/main" id="{91C10F38-E1BB-2B3A-4DCA-817DBDA9110E}"/>
+                <a16:creationId xmlns:a16="http://schemas.microsoft.com/office/drawing/2014/main" id="{1AF8BF90-FA32-1222-AE39-5D9E9FFDC1BD}"/>
               </a:ext>
             </a:extLst>
           </p:cNvPr>
           <p:cNvPicPr>
-            <a:picLocks noChangeAspect="1"/>
+            <a:picLocks noChangeAspect="1" noChangeArrowheads="1"/>
           </p:cNvPicPr>
           <p:nvPr/>
         </p:nvPicPr>
         <p:blipFill>
-          <a:blip r:embed="rId4"/>
+          <a:blip r:embed="rId4">
+            <a:extLst>
+              <a:ext uri="{28A0092B-C50C-407E-A947-70E740481C1C}">
+                <a14:useLocalDpi xmlns:a14="http://schemas.microsoft.com/office/drawing/2010/main" val="0"/>
+              </a:ext>
+            </a:extLst>
+          </a:blip>
+          <a:srcRect/>
           <a:stretch>
             <a:fillRect/>
           </a:stretch>
         </p:blipFill>
-        <p:spPr>
+        <p:spPr bwMode="auto">
           <a:xfrm>
-            <a:off x="4952259" y="1334234"/>
-            <a:ext cx="4007340" cy="3249194"/>
+            <a:off x="4572001" y="1489822"/>
+            <a:ext cx="4404360" cy="1470547"/>
           </a:xfrm>
           <a:prstGeom prst="rect">
             <a:avLst/>
           </a:prstGeom>
-          <a:ln>
+          <a:noFill/>
+          <a:ln w="9525">
             <a:solidFill>
               <a:srgbClr val="000000"/>
             </a:solidFill>
+            <a:miter lim="800000"/>
+            <a:headEnd/>
+            <a:tailEnd/>
           </a:ln>
+          <a:extLst>
+            <a:ext uri="{909E8E84-426E-40DD-AFC4-6F175D3DCCD1}">
+              <a14:hiddenFill xmlns:a14="http://schemas.microsoft.com/office/drawing/2010/main">
+                <a:solidFill>
+                  <a:srgbClr val="FFFFFF"/>
+                </a:solidFill>
+              </a14:hiddenFill>
+            </a:ext>
+          </a:extLst>
         </p:spPr>
       </p:pic>
     </p:spTree>
@@ -9102,7 +9390,7 @@
 </p:sld>
 </file>
 
-<file path=ppt/slides/slide12.xml><?xml version="1.0" encoding="utf-8"?>
+<file path=ppt/slides/slide13.xml><?xml version="1.0" encoding="utf-8"?>
 <p:sld xmlns:a="http://schemas.openxmlformats.org/drawingml/2006/main" xmlns:r="http://schemas.openxmlformats.org/officeDocument/2006/relationships" xmlns:p="http://schemas.openxmlformats.org/presentationml/2006/main">
   <p:cSld>
     <p:bg>
@@ -9159,11 +9447,7 @@
             </a:r>
             <a:r>
               <a:rPr lang="en-US" sz="2400" dirty="0" err="1"/>
-              <a:t>GetTotalDisabilityDays</a:t>
-            </a:r>
-            <a:r>
-              <a:rPr lang="en-US" sz="2400" dirty="0"/>
-              <a:t> </a:t>
+              <a:t>student_count_in_group</a:t>
             </a:r>
             <a:endParaRPr sz="2400" dirty="0"/>
           </a:p>
@@ -9171,10 +9455,10 @@
       </p:sp>
       <p:pic>
         <p:nvPicPr>
-          <p:cNvPr id="5" name="Рисунок 4">
+          <p:cNvPr id="8" name="Рисунок 7">
             <a:extLst>
               <a:ext uri="{FF2B5EF4-FFF2-40B4-BE49-F238E27FC236}">
-                <a16:creationId xmlns:a16="http://schemas.microsoft.com/office/drawing/2014/main" id="{3EF8225D-7E6B-0DE3-2C6E-0CD18181C7BF}"/>
+                <a16:creationId xmlns:a16="http://schemas.microsoft.com/office/drawing/2014/main" id="{03107CAC-CC4F-AA9C-4545-CDB6E2DC344A}"/>
               </a:ext>
             </a:extLst>
           </p:cNvPr>
@@ -9191,52 +9475,67 @@
         </p:blipFill>
         <p:spPr>
           <a:xfrm>
-            <a:off x="147824" y="1014969"/>
-            <a:ext cx="4868630" cy="4025459"/>
+            <a:off x="287934" y="1256554"/>
+            <a:ext cx="3696216" cy="2848373"/>
           </a:xfrm>
           <a:prstGeom prst="rect">
             <a:avLst/>
           </a:prstGeom>
-          <a:ln>
-            <a:solidFill>
-              <a:srgbClr val="000000"/>
-            </a:solidFill>
-          </a:ln>
         </p:spPr>
       </p:pic>
       <p:pic>
         <p:nvPicPr>
-          <p:cNvPr id="7" name="Рисунок 6">
+          <p:cNvPr id="9" name="Рисунок 1">
             <a:extLst>
               <a:ext uri="{FF2B5EF4-FFF2-40B4-BE49-F238E27FC236}">
-                <a16:creationId xmlns:a16="http://schemas.microsoft.com/office/drawing/2014/main" id="{CF559495-C712-2F35-3F30-F0AA9F3DE7BE}"/>
+                <a16:creationId xmlns:a16="http://schemas.microsoft.com/office/drawing/2014/main" id="{198A5CF9-3413-1C26-066B-7337EBF84D6F}"/>
               </a:ext>
             </a:extLst>
           </p:cNvPr>
           <p:cNvPicPr>
-            <a:picLocks noChangeAspect="1"/>
+            <a:picLocks noChangeAspect="1" noChangeArrowheads="1"/>
           </p:cNvPicPr>
           <p:nvPr/>
         </p:nvPicPr>
         <p:blipFill>
-          <a:blip r:embed="rId4"/>
+          <a:blip r:embed="rId4">
+            <a:extLst>
+              <a:ext uri="{28A0092B-C50C-407E-A947-70E740481C1C}">
+                <a14:useLocalDpi xmlns:a14="http://schemas.microsoft.com/office/drawing/2010/main" val="0"/>
+              </a:ext>
+            </a:extLst>
+          </a:blip>
+          <a:srcRect/>
           <a:stretch>
             <a:fillRect/>
           </a:stretch>
         </p:blipFill>
-        <p:spPr>
+        <p:spPr bwMode="auto">
           <a:xfrm>
-            <a:off x="5159851" y="1950469"/>
-            <a:ext cx="3836325" cy="2154458"/>
+            <a:off x="5159852" y="1443037"/>
+            <a:ext cx="3467100" cy="2257425"/>
           </a:xfrm>
           <a:prstGeom prst="rect">
             <a:avLst/>
           </a:prstGeom>
-          <a:ln>
+          <a:noFill/>
+          <a:ln w="9525">
             <a:solidFill>
               <a:srgbClr val="000000"/>
             </a:solidFill>
+            <a:miter lim="800000"/>
+            <a:headEnd/>
+            <a:tailEnd/>
           </a:ln>
+          <a:extLst>
+            <a:ext uri="{909E8E84-426E-40DD-AFC4-6F175D3DCCD1}">
+              <a14:hiddenFill xmlns:a14="http://schemas.microsoft.com/office/drawing/2010/main">
+                <a:solidFill>
+                  <a:srgbClr val="FFFFFF"/>
+                </a:solidFill>
+              </a14:hiddenFill>
+            </a:ext>
+          </a:extLst>
         </p:spPr>
       </p:pic>
     </p:spTree>
@@ -9247,7 +9546,7 @@
 </p:sld>
 </file>
 
-<file path=ppt/slides/slide13.xml><?xml version="1.0" encoding="utf-8"?>
+<file path=ppt/slides/slide14.xml><?xml version="1.0" encoding="utf-8"?>
 <p:sld xmlns:a="http://schemas.openxmlformats.org/drawingml/2006/main" xmlns:r="http://schemas.openxmlformats.org/officeDocument/2006/relationships" xmlns:p="http://schemas.openxmlformats.org/presentationml/2006/main">
   <p:cSld>
     <p:bg>
@@ -9300,7 +9599,7 @@
             </a:r>
             <a:r>
               <a:rPr lang="en-US" sz="2400" dirty="0" err="1"/>
-              <a:t>AddNewPatient</a:t>
+              <a:t>create_student</a:t>
             </a:r>
             <a:endParaRPr sz="2400" dirty="0"/>
           </a:p>
@@ -9308,10 +9607,10 @@
       </p:sp>
       <p:pic>
         <p:nvPicPr>
-          <p:cNvPr id="5" name="Рисунок 4">
+          <p:cNvPr id="2" name="Рисунок 1">
             <a:extLst>
               <a:ext uri="{FF2B5EF4-FFF2-40B4-BE49-F238E27FC236}">
-                <a16:creationId xmlns:a16="http://schemas.microsoft.com/office/drawing/2014/main" id="{E00BCD58-878A-2656-725F-BE73B9253352}"/>
+                <a16:creationId xmlns:a16="http://schemas.microsoft.com/office/drawing/2014/main" id="{52F088D2-0676-03C4-2CA2-9F68C7D24A31}"/>
               </a:ext>
             </a:extLst>
           </p:cNvPr>
@@ -9321,59 +9620,74 @@
           <p:nvPr/>
         </p:nvPicPr>
         <p:blipFill>
-          <a:blip r:embed="rId4"/>
+          <a:blip r:embed="rId3"/>
           <a:stretch>
             <a:fillRect/>
           </a:stretch>
         </p:blipFill>
         <p:spPr>
           <a:xfrm>
-            <a:off x="2536021" y="1045980"/>
-            <a:ext cx="4071958" cy="3051539"/>
+            <a:off x="452625" y="1142999"/>
+            <a:ext cx="3066954" cy="3738417"/>
           </a:xfrm>
           <a:prstGeom prst="rect">
             <a:avLst/>
           </a:prstGeom>
-          <a:ln>
-            <a:solidFill>
-              <a:srgbClr val="000000"/>
-            </a:solidFill>
-          </a:ln>
         </p:spPr>
       </p:pic>
       <p:pic>
         <p:nvPicPr>
-          <p:cNvPr id="7" name="Рисунок 6">
+          <p:cNvPr id="3" name="Рисунок 1">
             <a:extLst>
               <a:ext uri="{FF2B5EF4-FFF2-40B4-BE49-F238E27FC236}">
-                <a16:creationId xmlns:a16="http://schemas.microsoft.com/office/drawing/2014/main" id="{D1400AB9-4E8B-C04E-C446-CBDAA2213D91}"/>
+                <a16:creationId xmlns:a16="http://schemas.microsoft.com/office/drawing/2014/main" id="{2168D02B-E178-C72D-BB68-FE77357455D4}"/>
               </a:ext>
             </a:extLst>
           </p:cNvPr>
           <p:cNvPicPr>
-            <a:picLocks noChangeAspect="1"/>
+            <a:picLocks noChangeAspect="1" noChangeArrowheads="1"/>
           </p:cNvPicPr>
           <p:nvPr/>
         </p:nvPicPr>
         <p:blipFill>
-          <a:blip r:embed="rId5"/>
+          <a:blip r:embed="rId4">
+            <a:extLst>
+              <a:ext uri="{28A0092B-C50C-407E-A947-70E740481C1C}">
+                <a14:useLocalDpi xmlns:a14="http://schemas.microsoft.com/office/drawing/2010/main" val="0"/>
+              </a:ext>
+            </a:extLst>
+          </a:blip>
+          <a:srcRect/>
           <a:stretch>
             <a:fillRect/>
           </a:stretch>
         </p:blipFill>
-        <p:spPr>
+        <p:spPr bwMode="auto">
           <a:xfrm>
-            <a:off x="1389888" y="4213874"/>
-            <a:ext cx="6364224" cy="750701"/>
+            <a:off x="4033387" y="1494958"/>
+            <a:ext cx="4775333" cy="1076791"/>
           </a:xfrm>
           <a:prstGeom prst="rect">
             <a:avLst/>
           </a:prstGeom>
-          <a:ln>
+          <a:noFill/>
+          <a:ln w="9525">
             <a:solidFill>
               <a:srgbClr val="000000"/>
             </a:solidFill>
+            <a:miter lim="800000"/>
+            <a:headEnd/>
+            <a:tailEnd/>
           </a:ln>
+          <a:extLst>
+            <a:ext uri="{909E8E84-426E-40DD-AFC4-6F175D3DCCD1}">
+              <a14:hiddenFill xmlns:a14="http://schemas.microsoft.com/office/drawing/2010/main">
+                <a:solidFill>
+                  <a:srgbClr val="FFFFFF"/>
+                </a:solidFill>
+              </a14:hiddenFill>
+            </a:ext>
+          </a:extLst>
         </p:spPr>
       </p:pic>
     </p:spTree>
@@ -9384,7 +9698,7 @@
 </p:sld>
 </file>
 
-<file path=ppt/slides/slide14.xml><?xml version="1.0" encoding="utf-8"?>
+<file path=ppt/slides/slide15.xml><?xml version="1.0" encoding="utf-8"?>
 <p:sld xmlns:a="http://schemas.openxmlformats.org/drawingml/2006/main" xmlns:r="http://schemas.openxmlformats.org/officeDocument/2006/relationships" xmlns:p="http://schemas.openxmlformats.org/presentationml/2006/main">
   <p:cSld>
     <p:spTree>
@@ -9433,7 +9747,7 @@
             </a:r>
             <a:r>
               <a:rPr lang="en-US" sz="2400" dirty="0" err="1"/>
-              <a:t>AnalyzeDispensaryByDiagnosis</a:t>
+              <a:t>update_session_grades</a:t>
             </a:r>
             <a:endParaRPr lang="ru-RU" sz="2400" dirty="0"/>
           </a:p>
@@ -9441,10 +9755,10 @@
       </p:sp>
       <p:pic>
         <p:nvPicPr>
-          <p:cNvPr id="6" name="Рисунок 5">
+          <p:cNvPr id="3" name="Рисунок 2">
             <a:extLst>
               <a:ext uri="{FF2B5EF4-FFF2-40B4-BE49-F238E27FC236}">
-                <a16:creationId xmlns:a16="http://schemas.microsoft.com/office/drawing/2014/main" id="{CC915B73-660D-3A1A-2092-81BC53629920}"/>
+                <a16:creationId xmlns:a16="http://schemas.microsoft.com/office/drawing/2014/main" id="{0FEA7847-6ED6-BFB4-66C9-CCEFFB78E351}"/>
               </a:ext>
             </a:extLst>
           </p:cNvPr>
@@ -9461,25 +9775,20 @@
         </p:blipFill>
         <p:spPr>
           <a:xfrm>
-            <a:off x="2244088" y="929625"/>
-            <a:ext cx="4413504" cy="2988671"/>
+            <a:off x="189676" y="1116906"/>
+            <a:ext cx="2076422" cy="1748214"/>
           </a:xfrm>
           <a:prstGeom prst="rect">
             <a:avLst/>
           </a:prstGeom>
-          <a:ln>
-            <a:solidFill>
-              <a:srgbClr val="000000"/>
-            </a:solidFill>
-          </a:ln>
         </p:spPr>
       </p:pic>
       <p:pic>
         <p:nvPicPr>
-          <p:cNvPr id="8" name="Рисунок 7">
+          <p:cNvPr id="7" name="Рисунок 6">
             <a:extLst>
               <a:ext uri="{FF2B5EF4-FFF2-40B4-BE49-F238E27FC236}">
-                <a16:creationId xmlns:a16="http://schemas.microsoft.com/office/drawing/2014/main" id="{2724950E-4E73-69FE-C179-6DC528A3C166}"/>
+                <a16:creationId xmlns:a16="http://schemas.microsoft.com/office/drawing/2014/main" id="{D48D8A31-89CA-6D51-04BD-85376B219BA3}"/>
               </a:ext>
             </a:extLst>
           </p:cNvPr>
@@ -9496,17 +9805,67 @@
         </p:blipFill>
         <p:spPr>
           <a:xfrm>
-            <a:off x="2584882" y="4006611"/>
-            <a:ext cx="3731916" cy="1005230"/>
+            <a:off x="189676" y="2865120"/>
+            <a:ext cx="2101223" cy="1584960"/>
           </a:xfrm>
           <a:prstGeom prst="rect">
             <a:avLst/>
           </a:prstGeom>
-          <a:ln>
+        </p:spPr>
+      </p:pic>
+      <p:pic>
+        <p:nvPicPr>
+          <p:cNvPr id="11" name="Рисунок 1">
+            <a:extLst>
+              <a:ext uri="{FF2B5EF4-FFF2-40B4-BE49-F238E27FC236}">
+                <a16:creationId xmlns:a16="http://schemas.microsoft.com/office/drawing/2014/main" id="{A34A11BE-6554-6B4C-C99C-26897F106A4D}"/>
+              </a:ext>
+            </a:extLst>
+          </p:cNvPr>
+          <p:cNvPicPr>
+            <a:picLocks noChangeAspect="1" noChangeArrowheads="1"/>
+          </p:cNvPicPr>
+          <p:nvPr/>
+        </p:nvPicPr>
+        <p:blipFill>
+          <a:blip r:embed="rId4">
+            <a:extLst>
+              <a:ext uri="{28A0092B-C50C-407E-A947-70E740481C1C}">
+                <a14:useLocalDpi xmlns:a14="http://schemas.microsoft.com/office/drawing/2010/main" val="0"/>
+              </a:ext>
+            </a:extLst>
+          </a:blip>
+          <a:srcRect/>
+          <a:stretch>
+            <a:fillRect/>
+          </a:stretch>
+        </p:blipFill>
+        <p:spPr bwMode="auto">
+          <a:xfrm>
+            <a:off x="3217545" y="2000250"/>
+            <a:ext cx="5514975" cy="1143000"/>
+          </a:xfrm>
+          <a:prstGeom prst="rect">
+            <a:avLst/>
+          </a:prstGeom>
+          <a:noFill/>
+          <a:ln w="9525">
             <a:solidFill>
               <a:srgbClr val="000000"/>
             </a:solidFill>
+            <a:miter lim="800000"/>
+            <a:headEnd/>
+            <a:tailEnd/>
           </a:ln>
+          <a:extLst>
+            <a:ext uri="{909E8E84-426E-40DD-AFC4-6F175D3DCCD1}">
+              <a14:hiddenFill xmlns:a14="http://schemas.microsoft.com/office/drawing/2010/main">
+                <a:solidFill>
+                  <a:srgbClr val="FFFFFF"/>
+                </a:solidFill>
+              </a14:hiddenFill>
+            </a:ext>
+          </a:extLst>
         </p:spPr>
       </p:pic>
     </p:spTree>
@@ -9522,7 +9881,7 @@
 </p:sld>
 </file>
 
-<file path=ppt/slides/slide15.xml><?xml version="1.0" encoding="utf-8"?>
+<file path=ppt/slides/slide16.xml><?xml version="1.0" encoding="utf-8"?>
 <p:sld xmlns:a="http://schemas.openxmlformats.org/drawingml/2006/main" xmlns:r="http://schemas.openxmlformats.org/officeDocument/2006/relationships" xmlns:p="http://schemas.openxmlformats.org/presentationml/2006/main">
   <p:cSld>
     <p:spTree>
@@ -9567,7 +9926,7 @@
             </a:r>
             <a:r>
               <a:rPr lang="en-US" sz="2400" dirty="0" err="1"/>
-              <a:t>GetPatientCountByAgeGroup</a:t>
+              <a:t>student_replace_group</a:t>
             </a:r>
             <a:endParaRPr lang="ru-RU" sz="2400" dirty="0"/>
           </a:p>
@@ -9575,10 +9934,10 @@
       </p:sp>
       <p:pic>
         <p:nvPicPr>
-          <p:cNvPr id="5" name="Рисунок 4">
+          <p:cNvPr id="3" name="Рисунок 2">
             <a:extLst>
               <a:ext uri="{FF2B5EF4-FFF2-40B4-BE49-F238E27FC236}">
-                <a16:creationId xmlns:a16="http://schemas.microsoft.com/office/drawing/2014/main" id="{82468EB0-0233-C8DE-C3A4-E0AAC69FF30F}"/>
+                <a16:creationId xmlns:a16="http://schemas.microsoft.com/office/drawing/2014/main" id="{226D3F86-3B5B-9F5E-499D-3EE1570A7BE8}"/>
               </a:ext>
             </a:extLst>
           </p:cNvPr>
@@ -9595,52 +9954,122 @@
         </p:blipFill>
         <p:spPr>
           <a:xfrm>
-            <a:off x="928112" y="929625"/>
-            <a:ext cx="3228455" cy="4107344"/>
+            <a:off x="452624" y="1082039"/>
+            <a:ext cx="3760207" cy="3753269"/>
           </a:xfrm>
           <a:prstGeom prst="rect">
             <a:avLst/>
           </a:prstGeom>
-          <a:ln>
-            <a:solidFill>
-              <a:schemeClr val="tx1"/>
-            </a:solidFill>
-          </a:ln>
         </p:spPr>
       </p:pic>
       <p:pic>
         <p:nvPicPr>
-          <p:cNvPr id="7" name="Рисунок 6">
+          <p:cNvPr id="4" name="Рисунок 1">
             <a:extLst>
               <a:ext uri="{FF2B5EF4-FFF2-40B4-BE49-F238E27FC236}">
-                <a16:creationId xmlns:a16="http://schemas.microsoft.com/office/drawing/2014/main" id="{41D54E40-766A-A5C9-DDA3-491611E6D480}"/>
+                <a16:creationId xmlns:a16="http://schemas.microsoft.com/office/drawing/2014/main" id="{095FEC9A-9FCF-BB8B-7450-A975B52122E0}"/>
               </a:ext>
             </a:extLst>
           </p:cNvPr>
           <p:cNvPicPr>
-            <a:picLocks noChangeAspect="1"/>
+            <a:picLocks noChangeAspect="1" noChangeArrowheads="1"/>
           </p:cNvPicPr>
           <p:nvPr/>
         </p:nvPicPr>
         <p:blipFill>
-          <a:blip r:embed="rId4"/>
+          <a:blip r:embed="rId4">
+            <a:extLst>
+              <a:ext uri="{28A0092B-C50C-407E-A947-70E740481C1C}">
+                <a14:useLocalDpi xmlns:a14="http://schemas.microsoft.com/office/drawing/2010/main" val="0"/>
+              </a:ext>
+            </a:extLst>
+          </a:blip>
+          <a:srcRect/>
           <a:stretch>
             <a:fillRect/>
           </a:stretch>
         </p:blipFill>
-        <p:spPr>
+        <p:spPr bwMode="auto">
           <a:xfrm>
-            <a:off x="4632055" y="1696746"/>
-            <a:ext cx="3897367" cy="2573101"/>
+            <a:off x="4698683" y="1082039"/>
+            <a:ext cx="4110037" cy="947444"/>
           </a:xfrm>
           <a:prstGeom prst="rect">
             <a:avLst/>
           </a:prstGeom>
-          <a:ln>
+          <a:noFill/>
+          <a:ln w="9525">
             <a:solidFill>
-              <a:schemeClr val="tx1"/>
+              <a:srgbClr val="000000"/>
             </a:solidFill>
+            <a:miter lim="800000"/>
+            <a:headEnd/>
+            <a:tailEnd/>
           </a:ln>
+          <a:extLst>
+            <a:ext uri="{909E8E84-426E-40DD-AFC4-6F175D3DCCD1}">
+              <a14:hiddenFill xmlns:a14="http://schemas.microsoft.com/office/drawing/2010/main">
+                <a:solidFill>
+                  <a:srgbClr val="FFFFFF"/>
+                </a:solidFill>
+              </a14:hiddenFill>
+            </a:ext>
+          </a:extLst>
+        </p:spPr>
+      </p:pic>
+      <p:pic>
+        <p:nvPicPr>
+          <p:cNvPr id="6" name="Рисунок 1">
+            <a:extLst>
+              <a:ext uri="{FF2B5EF4-FFF2-40B4-BE49-F238E27FC236}">
+                <a16:creationId xmlns:a16="http://schemas.microsoft.com/office/drawing/2014/main" id="{095DDA12-2DB4-548C-F1FB-E0AB27A8CD97}"/>
+              </a:ext>
+            </a:extLst>
+          </p:cNvPr>
+          <p:cNvPicPr>
+            <a:picLocks noChangeAspect="1" noChangeArrowheads="1"/>
+          </p:cNvPicPr>
+          <p:nvPr/>
+        </p:nvPicPr>
+        <p:blipFill>
+          <a:blip r:embed="rId5">
+            <a:extLst>
+              <a:ext uri="{28A0092B-C50C-407E-A947-70E740481C1C}">
+                <a14:useLocalDpi xmlns:a14="http://schemas.microsoft.com/office/drawing/2010/main" val="0"/>
+              </a:ext>
+            </a:extLst>
+          </a:blip>
+          <a:srcRect/>
+          <a:stretch>
+            <a:fillRect/>
+          </a:stretch>
+        </p:blipFill>
+        <p:spPr bwMode="auto">
+          <a:xfrm>
+            <a:off x="4698684" y="3382240"/>
+            <a:ext cx="4117822" cy="830682"/>
+          </a:xfrm>
+          <a:prstGeom prst="rect">
+            <a:avLst/>
+          </a:prstGeom>
+          <a:noFill/>
+          <a:ln w="9525">
+            <a:solidFill>
+              <a:srgbClr val="000000"/>
+            </a:solidFill>
+            <a:miter lim="800000"/>
+            <a:headEnd/>
+            <a:tailEnd/>
+          </a:ln>
+          <a:extLst>
+            <a:ext uri="{909E8E84-426E-40DD-AFC4-6F175D3DCCD1}">
+              <a14:hiddenFill xmlns:a14="http://schemas.microsoft.com/office/drawing/2010/main">
+                <a:solidFill>
+                  <a:srgbClr val="FFFFFF"/>
+                </a:solidFill>
+              </a14:hiddenFill>
+            </a:ext>
+          </a:extLst>
         </p:spPr>
       </p:pic>
     </p:spTree>
@@ -9656,7 +10085,7 @@
 </p:sld>
 </file>
 
-<file path=ppt/slides/slide16.xml><?xml version="1.0" encoding="utf-8"?>
+<file path=ppt/slides/slide17.xml><?xml version="1.0" encoding="utf-8"?>
 <p:sld xmlns:a="http://schemas.openxmlformats.org/drawingml/2006/main" xmlns:r="http://schemas.openxmlformats.org/officeDocument/2006/relationships" xmlns:p="http://schemas.openxmlformats.org/presentationml/2006/main">
   <p:cSld>
     <p:spTree>
@@ -9701,7 +10130,7 @@
             </a:r>
             <a:r>
               <a:rPr lang="en-US" dirty="0" err="1"/>
-              <a:t>tr_after_insert_treatment_dispensary</a:t>
+              <a:t>validate_phone</a:t>
             </a:r>
             <a:endParaRPr lang="ru-RU" sz="2400" dirty="0"/>
           </a:p>
@@ -9709,10 +10138,10 @@
       </p:sp>
       <p:pic>
         <p:nvPicPr>
-          <p:cNvPr id="6" name="Рисунок 5">
+          <p:cNvPr id="3" name="Рисунок 2">
             <a:extLst>
               <a:ext uri="{FF2B5EF4-FFF2-40B4-BE49-F238E27FC236}">
-                <a16:creationId xmlns:a16="http://schemas.microsoft.com/office/drawing/2014/main" id="{D0F42D3E-D479-8998-BA19-EA33C0EF5AB8}"/>
+                <a16:creationId xmlns:a16="http://schemas.microsoft.com/office/drawing/2014/main" id="{37F4CEFB-4250-3718-A8B2-45708C7FF5F8}"/>
               </a:ext>
             </a:extLst>
           </p:cNvPr>
@@ -9729,17 +10158,533 @@
         </p:blipFill>
         <p:spPr>
           <a:xfrm>
-            <a:off x="2219039" y="1464202"/>
-            <a:ext cx="4705922" cy="2972161"/>
+            <a:off x="640080" y="1009073"/>
+            <a:ext cx="1554480" cy="1574107"/>
           </a:xfrm>
           <a:prstGeom prst="rect">
             <a:avLst/>
           </a:prstGeom>
-          <a:ln>
+        </p:spPr>
+      </p:pic>
+      <p:pic>
+        <p:nvPicPr>
+          <p:cNvPr id="7" name="Рисунок 6">
+            <a:extLst>
+              <a:ext uri="{FF2B5EF4-FFF2-40B4-BE49-F238E27FC236}">
+                <a16:creationId xmlns:a16="http://schemas.microsoft.com/office/drawing/2014/main" id="{4E9348A5-F1C5-0A29-C40F-7C669038DF9C}"/>
+              </a:ext>
+            </a:extLst>
+          </p:cNvPr>
+          <p:cNvPicPr>
+            <a:picLocks noChangeAspect="1"/>
+          </p:cNvPicPr>
+          <p:nvPr/>
+        </p:nvPicPr>
+        <p:blipFill>
+          <a:blip r:embed="rId3"/>
+          <a:stretch>
+            <a:fillRect/>
+          </a:stretch>
+        </p:blipFill>
+        <p:spPr>
+          <a:xfrm>
+            <a:off x="640080" y="2560320"/>
+            <a:ext cx="2819901" cy="1574107"/>
+          </a:xfrm>
+          <a:prstGeom prst="rect">
+            <a:avLst/>
+          </a:prstGeom>
+        </p:spPr>
+      </p:pic>
+      <p:sp>
+        <p:nvSpPr>
+          <p:cNvPr id="9" name="Rectangle 2">
+            <a:extLst>
+              <a:ext uri="{FF2B5EF4-FFF2-40B4-BE49-F238E27FC236}">
+                <a16:creationId xmlns:a16="http://schemas.microsoft.com/office/drawing/2014/main" id="{4788CA04-D378-473A-1BF5-D18EFD4881A0}"/>
+              </a:ext>
+            </a:extLst>
+          </p:cNvPr>
+          <p:cNvSpPr>
+            <a:spLocks noChangeArrowheads="1"/>
+          </p:cNvSpPr>
+          <p:nvPr/>
+        </p:nvSpPr>
+        <p:spPr bwMode="auto">
+          <a:xfrm>
+            <a:off x="3759878" y="1009073"/>
+            <a:ext cx="4744042" cy="2246769"/>
+          </a:xfrm>
+          <a:prstGeom prst="rect">
+            <a:avLst/>
+          </a:prstGeom>
+          <a:noFill/>
+          <a:ln w="9525">
             <a:solidFill>
               <a:schemeClr val="tx1"/>
             </a:solidFill>
+            <a:miter lim="800000"/>
+            <a:headEnd/>
+            <a:tailEnd/>
           </a:ln>
+          <a:effectLst/>
+          <a:extLst>
+            <a:ext uri="{909E8E84-426E-40DD-AFC4-6F175D3DCCD1}">
+              <a14:hiddenFill xmlns:a14="http://schemas.microsoft.com/office/drawing/2010/main">
+                <a:solidFill>
+                  <a:schemeClr val="accent1"/>
+                </a:solidFill>
+              </a14:hiddenFill>
+            </a:ext>
+            <a:ext uri="{AF507438-7753-43E0-B8FC-AC1667EBCBE1}">
+              <a14:hiddenEffects xmlns:a14="http://schemas.microsoft.com/office/drawing/2010/main">
+                <a:effectLst>
+                  <a:outerShdw dist="35921" dir="2700000" algn="ctr" rotWithShape="0">
+                    <a:schemeClr val="bg2"/>
+                  </a:outerShdw>
+                </a:effectLst>
+              </a14:hiddenEffects>
+            </a:ext>
+          </a:extLst>
+        </p:spPr>
+        <p:txBody>
+          <a:bodyPr vert="horz" wrap="square" lIns="91440" tIns="45720" rIns="91440" bIns="45720" numCol="1" anchor="ctr" anchorCtr="0" compatLnSpc="1">
+            <a:prstTxWarp prst="textNoShape">
+              <a:avLst/>
+            </a:prstTxWarp>
+            <a:spAutoFit/>
+          </a:bodyPr>
+          <a:lstStyle/>
+          <a:p>
+            <a:pPr marL="0" marR="0" lvl="0" indent="450850" algn="just" defTabSz="914400" rtl="0" eaLnBrk="0" fontAlgn="base" latinLnBrk="0" hangingPunct="0">
+              <a:lnSpc>
+                <a:spcPct val="100000"/>
+              </a:lnSpc>
+              <a:spcBef>
+                <a:spcPct val="0"/>
+              </a:spcBef>
+              <a:spcAft>
+                <a:spcPct val="0"/>
+              </a:spcAft>
+              <a:buClrTx/>
+              <a:buSzTx/>
+              <a:buFontTx/>
+              <a:buNone/>
+              <a:tabLst/>
+            </a:pPr>
+            <a:r>
+              <a:rPr kumimoji="0" lang="en-US" altLang="ru-RU" sz="1400" b="0" i="0" u="none" strike="noStrike" cap="none" normalizeH="0" baseline="0" dirty="0">
+                <a:ln>
+                  <a:noFill/>
+                </a:ln>
+                <a:solidFill>
+                  <a:schemeClr val="tx1"/>
+                </a:solidFill>
+                <a:effectLst/>
+                <a:latin typeface="Arial" panose="020B0604020202020204" pitchFamily="34" charset="0"/>
+                <a:ea typeface="Times New Roman" panose="02020603050405020304" pitchFamily="18" charset="0"/>
+              </a:rPr>
+              <a:t>INSERT INTO students (</a:t>
+            </a:r>
+            <a:r>
+              <a:rPr kumimoji="0" lang="en-US" altLang="ru-RU" sz="1400" b="0" i="0" u="none" strike="noStrike" cap="none" normalizeH="0" baseline="0" dirty="0" err="1">
+                <a:ln>
+                  <a:noFill/>
+                </a:ln>
+                <a:solidFill>
+                  <a:schemeClr val="tx1"/>
+                </a:solidFill>
+                <a:effectLst/>
+                <a:latin typeface="Arial" panose="020B0604020202020204" pitchFamily="34" charset="0"/>
+                <a:ea typeface="Times New Roman" panose="02020603050405020304" pitchFamily="18" charset="0"/>
+              </a:rPr>
+              <a:t>full_name</a:t>
+            </a:r>
+            <a:r>
+              <a:rPr kumimoji="0" lang="en-US" altLang="ru-RU" sz="1400" b="0" i="0" u="none" strike="noStrike" cap="none" normalizeH="0" baseline="0" dirty="0">
+                <a:ln>
+                  <a:noFill/>
+                </a:ln>
+                <a:solidFill>
+                  <a:schemeClr val="tx1"/>
+                </a:solidFill>
+                <a:effectLst/>
+                <a:latin typeface="Arial" panose="020B0604020202020204" pitchFamily="34" charset="0"/>
+                <a:ea typeface="Times New Roman" panose="02020603050405020304" pitchFamily="18" charset="0"/>
+              </a:rPr>
+              <a:t>, </a:t>
+            </a:r>
+            <a:r>
+              <a:rPr kumimoji="0" lang="en-US" altLang="ru-RU" sz="1400" b="0" i="0" u="none" strike="noStrike" cap="none" normalizeH="0" baseline="0" dirty="0" err="1">
+                <a:ln>
+                  <a:noFill/>
+                </a:ln>
+                <a:solidFill>
+                  <a:schemeClr val="tx1"/>
+                </a:solidFill>
+                <a:effectLst/>
+                <a:latin typeface="Arial" panose="020B0604020202020204" pitchFamily="34" charset="0"/>
+                <a:ea typeface="Times New Roman" panose="02020603050405020304" pitchFamily="18" charset="0"/>
+              </a:rPr>
+              <a:t>birth_date</a:t>
+            </a:r>
+            <a:r>
+              <a:rPr kumimoji="0" lang="en-US" altLang="ru-RU" sz="1400" b="0" i="0" u="none" strike="noStrike" cap="none" normalizeH="0" baseline="0" dirty="0">
+                <a:ln>
+                  <a:noFill/>
+                </a:ln>
+                <a:solidFill>
+                  <a:schemeClr val="tx1"/>
+                </a:solidFill>
+                <a:effectLst/>
+                <a:latin typeface="Arial" panose="020B0604020202020204" pitchFamily="34" charset="0"/>
+                <a:ea typeface="Times New Roman" panose="02020603050405020304" pitchFamily="18" charset="0"/>
+              </a:rPr>
+              <a:t>, address, phone, biography, </a:t>
+            </a:r>
+            <a:r>
+              <a:rPr kumimoji="0" lang="en-US" altLang="ru-RU" sz="1400" b="0" i="0" u="none" strike="noStrike" cap="none" normalizeH="0" baseline="0" dirty="0" err="1">
+                <a:ln>
+                  <a:noFill/>
+                </a:ln>
+                <a:solidFill>
+                  <a:schemeClr val="tx1"/>
+                </a:solidFill>
+                <a:effectLst/>
+                <a:latin typeface="Arial" panose="020B0604020202020204" pitchFamily="34" charset="0"/>
+                <a:ea typeface="Times New Roman" panose="02020603050405020304" pitchFamily="18" charset="0"/>
+              </a:rPr>
+              <a:t>group_id</a:t>
+            </a:r>
+            <a:r>
+              <a:rPr kumimoji="0" lang="en-US" altLang="ru-RU" sz="1400" b="0" i="0" u="none" strike="noStrike" cap="none" normalizeH="0" baseline="0" dirty="0">
+                <a:ln>
+                  <a:noFill/>
+                </a:ln>
+                <a:solidFill>
+                  <a:schemeClr val="tx1"/>
+                </a:solidFill>
+                <a:effectLst/>
+                <a:latin typeface="Arial" panose="020B0604020202020204" pitchFamily="34" charset="0"/>
+                <a:ea typeface="Times New Roman" panose="02020603050405020304" pitchFamily="18" charset="0"/>
+              </a:rPr>
+              <a:t>) VALUES</a:t>
+            </a:r>
+            <a:endParaRPr kumimoji="0" lang="ru-RU" altLang="ru-RU" sz="800" b="0" i="0" u="none" strike="noStrike" cap="none" normalizeH="0" baseline="0" dirty="0">
+              <a:ln>
+                <a:noFill/>
+              </a:ln>
+              <a:solidFill>
+                <a:schemeClr val="tx1"/>
+              </a:solidFill>
+              <a:effectLst/>
+              <a:latin typeface="Arial" panose="020B0604020202020204" pitchFamily="34" charset="0"/>
+            </a:endParaRPr>
+          </a:p>
+          <a:p>
+            <a:pPr marL="0" marR="0" lvl="0" indent="450850" algn="just" defTabSz="914400" rtl="0" eaLnBrk="0" fontAlgn="base" latinLnBrk="0" hangingPunct="0">
+              <a:lnSpc>
+                <a:spcPct val="100000"/>
+              </a:lnSpc>
+              <a:spcBef>
+                <a:spcPct val="0"/>
+              </a:spcBef>
+              <a:spcAft>
+                <a:spcPct val="0"/>
+              </a:spcAft>
+              <a:buClrTx/>
+              <a:buSzTx/>
+              <a:buFontTx/>
+              <a:buNone/>
+              <a:tabLst/>
+            </a:pPr>
+            <a:r>
+              <a:rPr kumimoji="0" lang="ru-RU" altLang="ru-RU" sz="1400" b="0" i="0" u="none" strike="noStrike" cap="none" normalizeH="0" baseline="0" dirty="0">
+                <a:ln>
+                  <a:noFill/>
+                </a:ln>
+                <a:solidFill>
+                  <a:schemeClr val="tx1"/>
+                </a:solidFill>
+                <a:effectLst/>
+                <a:latin typeface="Arial" panose="020B0604020202020204" pitchFamily="34" charset="0"/>
+                <a:ea typeface="Times New Roman" panose="02020603050405020304" pitchFamily="18" charset="0"/>
+              </a:rPr>
+              <a:t>('Кириллов Алексей Сергеевич', </a:t>
+            </a:r>
+            <a:endParaRPr kumimoji="0" lang="ru-RU" altLang="ru-RU" sz="800" b="0" i="0" u="none" strike="noStrike" cap="none" normalizeH="0" baseline="0" dirty="0">
+              <a:ln>
+                <a:noFill/>
+              </a:ln>
+              <a:solidFill>
+                <a:schemeClr val="tx1"/>
+              </a:solidFill>
+              <a:effectLst/>
+              <a:latin typeface="Arial" panose="020B0604020202020204" pitchFamily="34" charset="0"/>
+            </a:endParaRPr>
+          </a:p>
+          <a:p>
+            <a:pPr marL="0" marR="0" lvl="0" indent="450850" algn="just" defTabSz="914400" rtl="0" eaLnBrk="0" fontAlgn="base" latinLnBrk="0" hangingPunct="0">
+              <a:lnSpc>
+                <a:spcPct val="100000"/>
+              </a:lnSpc>
+              <a:spcBef>
+                <a:spcPct val="0"/>
+              </a:spcBef>
+              <a:spcAft>
+                <a:spcPct val="0"/>
+              </a:spcAft>
+              <a:buClrTx/>
+              <a:buSzTx/>
+              <a:buFontTx/>
+              <a:buNone/>
+              <a:tabLst/>
+            </a:pPr>
+            <a:r>
+              <a:rPr kumimoji="0" lang="ru-RU" altLang="ru-RU" sz="1400" b="0" i="0" u="none" strike="noStrike" cap="none" normalizeH="0" baseline="0" dirty="0">
+                <a:ln>
+                  <a:noFill/>
+                </a:ln>
+                <a:solidFill>
+                  <a:schemeClr val="tx1"/>
+                </a:solidFill>
+                <a:effectLst/>
+                <a:latin typeface="Arial" panose="020B0604020202020204" pitchFamily="34" charset="0"/>
+                <a:ea typeface="Times New Roman" panose="02020603050405020304" pitchFamily="18" charset="0"/>
+              </a:rPr>
+              <a:t>'2000-05-15', 'г. Москва, ул. Ленина, д. 25, кв. 12',</a:t>
+            </a:r>
+            <a:endParaRPr kumimoji="0" lang="ru-RU" altLang="ru-RU" sz="800" b="0" i="0" u="none" strike="noStrike" cap="none" normalizeH="0" baseline="0" dirty="0">
+              <a:ln>
+                <a:noFill/>
+              </a:ln>
+              <a:solidFill>
+                <a:schemeClr val="tx1"/>
+              </a:solidFill>
+              <a:effectLst/>
+              <a:latin typeface="Arial" panose="020B0604020202020204" pitchFamily="34" charset="0"/>
+            </a:endParaRPr>
+          </a:p>
+          <a:p>
+            <a:pPr marL="0" marR="0" lvl="0" indent="450850" algn="just" defTabSz="914400" rtl="0" eaLnBrk="0" fontAlgn="base" latinLnBrk="0" hangingPunct="0">
+              <a:lnSpc>
+                <a:spcPct val="100000"/>
+              </a:lnSpc>
+              <a:spcBef>
+                <a:spcPct val="0"/>
+              </a:spcBef>
+              <a:spcAft>
+                <a:spcPct val="0"/>
+              </a:spcAft>
+              <a:buClrTx/>
+              <a:buSzTx/>
+              <a:buFontTx/>
+              <a:buNone/>
+              <a:tabLst/>
+            </a:pPr>
+            <a:r>
+              <a:rPr kumimoji="0" lang="ru-RU" altLang="ru-RU" sz="1400" b="0" i="0" u="none" strike="noStrike" cap="none" normalizeH="0" baseline="0" dirty="0">
+                <a:ln>
+                  <a:noFill/>
+                </a:ln>
+                <a:solidFill>
+                  <a:schemeClr val="tx1"/>
+                </a:solidFill>
+                <a:effectLst/>
+                <a:latin typeface="Arial" panose="020B0604020202020204" pitchFamily="34" charset="0"/>
+                <a:ea typeface="Times New Roman" panose="02020603050405020304" pitchFamily="18" charset="0"/>
+              </a:rPr>
+              <a:t>'99161234567', </a:t>
+            </a:r>
+            <a:endParaRPr kumimoji="0" lang="ru-RU" altLang="ru-RU" sz="800" b="0" i="0" u="none" strike="noStrike" cap="none" normalizeH="0" baseline="0" dirty="0">
+              <a:ln>
+                <a:noFill/>
+              </a:ln>
+              <a:solidFill>
+                <a:schemeClr val="tx1"/>
+              </a:solidFill>
+              <a:effectLst/>
+              <a:latin typeface="Arial" panose="020B0604020202020204" pitchFamily="34" charset="0"/>
+            </a:endParaRPr>
+          </a:p>
+          <a:p>
+            <a:pPr marL="0" marR="0" lvl="0" indent="450850" algn="just" defTabSz="914400" rtl="0" eaLnBrk="0" fontAlgn="base" latinLnBrk="0" hangingPunct="0">
+              <a:lnSpc>
+                <a:spcPct val="100000"/>
+              </a:lnSpc>
+              <a:spcBef>
+                <a:spcPct val="0"/>
+              </a:spcBef>
+              <a:spcAft>
+                <a:spcPct val="0"/>
+              </a:spcAft>
+              <a:buClrTx/>
+              <a:buSzTx/>
+              <a:buFontTx/>
+              <a:buNone/>
+              <a:tabLst/>
+            </a:pPr>
+            <a:r>
+              <a:rPr kumimoji="0" lang="ru-RU" altLang="ru-RU" sz="1400" b="0" i="0" u="none" strike="noStrike" cap="none" normalizeH="0" baseline="0" dirty="0">
+                <a:ln>
+                  <a:noFill/>
+                </a:ln>
+                <a:solidFill>
+                  <a:schemeClr val="tx1"/>
+                </a:solidFill>
+                <a:effectLst/>
+                <a:latin typeface="Arial" panose="020B0604020202020204" pitchFamily="34" charset="0"/>
+                <a:ea typeface="Times New Roman" panose="02020603050405020304" pitchFamily="18" charset="0"/>
+              </a:rPr>
+              <a:t>'Родился в Москве. Увлекаюсь программированием с детства.',1);</a:t>
+            </a:r>
+            <a:endParaRPr kumimoji="0" lang="ru-RU" altLang="ru-RU" sz="800" b="0" i="0" u="none" strike="noStrike" cap="none" normalizeH="0" baseline="0" dirty="0">
+              <a:ln>
+                <a:noFill/>
+              </a:ln>
+              <a:solidFill>
+                <a:schemeClr val="tx1"/>
+              </a:solidFill>
+              <a:effectLst/>
+              <a:latin typeface="Arial" panose="020B0604020202020204" pitchFamily="34" charset="0"/>
+            </a:endParaRPr>
+          </a:p>
+          <a:p>
+            <a:pPr marL="0" marR="0" lvl="0" indent="450850" algn="just" defTabSz="914400" rtl="0" eaLnBrk="0" fontAlgn="base" latinLnBrk="0" hangingPunct="0">
+              <a:lnSpc>
+                <a:spcPct val="100000"/>
+              </a:lnSpc>
+              <a:spcBef>
+                <a:spcPct val="0"/>
+              </a:spcBef>
+              <a:spcAft>
+                <a:spcPct val="0"/>
+              </a:spcAft>
+              <a:buClrTx/>
+              <a:buSzTx/>
+              <a:buFontTx/>
+              <a:buNone/>
+              <a:tabLst/>
+            </a:pPr>
+            <a:r>
+              <a:rPr kumimoji="0" lang="ru-RU" altLang="ru-RU" sz="1400" b="0" i="0" u="none" strike="noStrike" cap="none" normalizeH="0" baseline="0" dirty="0">
+                <a:ln>
+                  <a:noFill/>
+                </a:ln>
+                <a:solidFill>
+                  <a:schemeClr val="tx1"/>
+                </a:solidFill>
+                <a:effectLst/>
+                <a:latin typeface="Arial" panose="020B0604020202020204" pitchFamily="34" charset="0"/>
+                <a:ea typeface="Times New Roman" panose="02020603050405020304" pitchFamily="18" charset="0"/>
+              </a:rPr>
+              <a:t>Получена ошибка:</a:t>
+            </a:r>
+            <a:endParaRPr kumimoji="0" lang="ru-RU" altLang="ru-RU" sz="800" b="0" i="0" u="none" strike="noStrike" cap="none" normalizeH="0" baseline="0" dirty="0">
+              <a:ln>
+                <a:noFill/>
+              </a:ln>
+              <a:solidFill>
+                <a:schemeClr val="tx1"/>
+              </a:solidFill>
+              <a:effectLst/>
+              <a:latin typeface="Arial" panose="020B0604020202020204" pitchFamily="34" charset="0"/>
+            </a:endParaRPr>
+          </a:p>
+          <a:p>
+            <a:pPr marL="0" marR="0" lvl="0" indent="450850" algn="just" defTabSz="914400" rtl="0" eaLnBrk="0" fontAlgn="base" latinLnBrk="0" hangingPunct="0">
+              <a:lnSpc>
+                <a:spcPct val="100000"/>
+              </a:lnSpc>
+              <a:spcBef>
+                <a:spcPct val="0"/>
+              </a:spcBef>
+              <a:spcAft>
+                <a:spcPct val="0"/>
+              </a:spcAft>
+              <a:buClrTx/>
+              <a:buSzTx/>
+              <a:buFontTx/>
+              <a:buNone/>
+              <a:tabLst/>
+            </a:pPr>
+            <a:r>
+              <a:rPr kumimoji="0" lang="ru-RU" altLang="ru-RU" sz="1400" b="0" i="0" u="none" strike="noStrike" cap="none" normalizeH="0" baseline="0" dirty="0">
+                <a:ln>
+                  <a:noFill/>
+                </a:ln>
+                <a:solidFill>
+                  <a:schemeClr val="tx1"/>
+                </a:solidFill>
+                <a:effectLst/>
+                <a:latin typeface="Arial" panose="020B0604020202020204" pitchFamily="34" charset="0"/>
+                <a:ea typeface="Times New Roman" panose="02020603050405020304" pitchFamily="18" charset="0"/>
+              </a:rPr>
+              <a:t>ОШИБКА: Номер телефона должен начинаться с 7 или 8. Получен: 99161234567.</a:t>
+            </a:r>
+            <a:endParaRPr kumimoji="0" lang="ru-RU" altLang="ru-RU" sz="800" b="0" i="0" u="none" strike="noStrike" cap="none" normalizeH="0" baseline="0" dirty="0">
+              <a:ln>
+                <a:noFill/>
+              </a:ln>
+              <a:solidFill>
+                <a:schemeClr val="tx1"/>
+              </a:solidFill>
+              <a:effectLst/>
+              <a:latin typeface="Arial" panose="020B0604020202020204" pitchFamily="34" charset="0"/>
+            </a:endParaRPr>
+          </a:p>
+        </p:txBody>
+      </p:sp>
+      <p:pic>
+        <p:nvPicPr>
+          <p:cNvPr id="10" name="Рисунок 1">
+            <a:extLst>
+              <a:ext uri="{FF2B5EF4-FFF2-40B4-BE49-F238E27FC236}">
+                <a16:creationId xmlns:a16="http://schemas.microsoft.com/office/drawing/2014/main" id="{E5821F73-6648-2438-2A3E-5F42316B1F22}"/>
+              </a:ext>
+            </a:extLst>
+          </p:cNvPr>
+          <p:cNvPicPr>
+            <a:picLocks noChangeAspect="1" noChangeArrowheads="1"/>
+          </p:cNvPicPr>
+          <p:nvPr/>
+        </p:nvPicPr>
+        <p:blipFill>
+          <a:blip r:embed="rId4">
+            <a:extLst>
+              <a:ext uri="{28A0092B-C50C-407E-A947-70E740481C1C}">
+                <a14:useLocalDpi xmlns:a14="http://schemas.microsoft.com/office/drawing/2010/main" val="0"/>
+              </a:ext>
+            </a:extLst>
+          </a:blip>
+          <a:srcRect/>
+          <a:stretch>
+            <a:fillRect/>
+          </a:stretch>
+        </p:blipFill>
+        <p:spPr bwMode="auto">
+          <a:xfrm>
+            <a:off x="3759878" y="3525516"/>
+            <a:ext cx="4897985" cy="1130304"/>
+          </a:xfrm>
+          <a:prstGeom prst="rect">
+            <a:avLst/>
+          </a:prstGeom>
+          <a:noFill/>
+          <a:ln>
+            <a:solidFill>
+              <a:srgbClr val="000000"/>
+            </a:solidFill>
+          </a:ln>
+          <a:extLst>
+            <a:ext uri="{909E8E84-426E-40DD-AFC4-6F175D3DCCD1}">
+              <a14:hiddenFill xmlns:a14="http://schemas.microsoft.com/office/drawing/2010/main">
+                <a:solidFill>
+                  <a:srgbClr val="FFFFFF"/>
+                </a:solidFill>
+              </a14:hiddenFill>
+            </a:ext>
+          </a:extLst>
         </p:spPr>
       </p:pic>
     </p:spTree>
@@ -9755,7 +10700,7 @@
 </p:sld>
 </file>
 
-<file path=ppt/slides/slide17.xml><?xml version="1.0" encoding="utf-8"?>
+<file path=ppt/slides/slide18.xml><?xml version="1.0" encoding="utf-8"?>
 <p:sld xmlns:a="http://schemas.openxmlformats.org/drawingml/2006/main" xmlns:r="http://schemas.openxmlformats.org/officeDocument/2006/relationships" xmlns:p="http://schemas.openxmlformats.org/presentationml/2006/main">
   <p:cSld>
     <p:spTree>
@@ -9800,7 +10745,7 @@
             </a:r>
             <a:r>
               <a:rPr lang="en-US" dirty="0" err="1"/>
-              <a:t>tr_before_insert_patient_validation</a:t>
+              <a:t>create_group_grade_records</a:t>
             </a:r>
             <a:endParaRPr lang="ru-RU" sz="2400" dirty="0"/>
           </a:p>
@@ -9808,10 +10753,10 @@
       </p:sp>
       <p:pic>
         <p:nvPicPr>
-          <p:cNvPr id="5" name="Рисунок 4">
+          <p:cNvPr id="3" name="Рисунок 2">
             <a:extLst>
               <a:ext uri="{FF2B5EF4-FFF2-40B4-BE49-F238E27FC236}">
-                <a16:creationId xmlns:a16="http://schemas.microsoft.com/office/drawing/2014/main" id="{273D0DCF-C529-8EA5-39DF-78C5B13AFE3E}"/>
+                <a16:creationId xmlns:a16="http://schemas.microsoft.com/office/drawing/2014/main" id="{906E1E6C-8386-21FE-07E4-A4DB057FF2A5}"/>
               </a:ext>
             </a:extLst>
           </p:cNvPr>
@@ -9828,25 +10773,20 @@
         </p:blipFill>
         <p:spPr>
           <a:xfrm>
-            <a:off x="810463" y="1133854"/>
-            <a:ext cx="3054401" cy="3800547"/>
+            <a:off x="328832" y="2013056"/>
+            <a:ext cx="3892648" cy="2557420"/>
           </a:xfrm>
           <a:prstGeom prst="rect">
             <a:avLst/>
           </a:prstGeom>
-          <a:ln>
-            <a:solidFill>
-              <a:schemeClr val="tx1"/>
-            </a:solidFill>
-          </a:ln>
         </p:spPr>
       </p:pic>
       <p:pic>
         <p:nvPicPr>
-          <p:cNvPr id="7" name="Рисунок 6">
+          <p:cNvPr id="4" name="Рисунок 3">
             <a:extLst>
               <a:ext uri="{FF2B5EF4-FFF2-40B4-BE49-F238E27FC236}">
-                <a16:creationId xmlns:a16="http://schemas.microsoft.com/office/drawing/2014/main" id="{D542F093-4E4B-1268-53B1-C0AFA126C5DB}"/>
+                <a16:creationId xmlns:a16="http://schemas.microsoft.com/office/drawing/2014/main" id="{9C6ECFC2-B3C7-4B12-AD5C-1DCD045CFA04}"/>
               </a:ext>
             </a:extLst>
           </p:cNvPr>
@@ -9863,17 +10803,12 @@
         </p:blipFill>
         <p:spPr>
           <a:xfrm>
-            <a:off x="4315968" y="1133853"/>
-            <a:ext cx="4175311" cy="3800547"/>
+            <a:off x="4624168" y="2013056"/>
+            <a:ext cx="3489960" cy="2578665"/>
           </a:xfrm>
           <a:prstGeom prst="rect">
             <a:avLst/>
           </a:prstGeom>
-          <a:ln>
-            <a:solidFill>
-              <a:schemeClr val="tx1"/>
-            </a:solidFill>
-          </a:ln>
         </p:spPr>
       </p:pic>
     </p:spTree>
@@ -9889,7 +10824,7 @@
 </p:sld>
 </file>
 
-<file path=ppt/slides/slide18.xml><?xml version="1.0" encoding="utf-8"?>
+<file path=ppt/slides/slide19.xml><?xml version="1.0" encoding="utf-8"?>
 <p:sld xmlns:a="http://schemas.openxmlformats.org/drawingml/2006/main" xmlns:r="http://schemas.openxmlformats.org/officeDocument/2006/relationships" xmlns:p="http://schemas.openxmlformats.org/presentationml/2006/main">
   <p:cSld>
     <p:spTree>
@@ -9934,7 +10869,7 @@
             </a:r>
             <a:r>
               <a:rPr lang="en-US" dirty="0" err="1"/>
-              <a:t>patient_treatment_summary</a:t>
+              <a:t>student_performance_report</a:t>
             </a:r>
             <a:endParaRPr lang="ru-RU" sz="2400" dirty="0"/>
           </a:p>
@@ -9942,10 +10877,10 @@
       </p:sp>
       <p:pic>
         <p:nvPicPr>
-          <p:cNvPr id="6" name="Рисунок 5">
+          <p:cNvPr id="3" name="Рисунок 2">
             <a:extLst>
               <a:ext uri="{FF2B5EF4-FFF2-40B4-BE49-F238E27FC236}">
-                <a16:creationId xmlns:a16="http://schemas.microsoft.com/office/drawing/2014/main" id="{289BECDA-066A-42B9-B536-09BD7B14B314}"/>
+                <a16:creationId xmlns:a16="http://schemas.microsoft.com/office/drawing/2014/main" id="{F3B51826-53B2-A35A-DA8A-E9A9F99F0855}"/>
               </a:ext>
             </a:extLst>
           </p:cNvPr>
@@ -9962,25 +10897,20 @@
         </p:blipFill>
         <p:spPr>
           <a:xfrm>
-            <a:off x="604632" y="1039353"/>
-            <a:ext cx="3967368" cy="3939912"/>
+            <a:off x="452624" y="1082040"/>
+            <a:ext cx="3063415" cy="3549396"/>
           </a:xfrm>
           <a:prstGeom prst="rect">
             <a:avLst/>
           </a:prstGeom>
-          <a:ln>
-            <a:solidFill>
-              <a:schemeClr val="tx1"/>
-            </a:solidFill>
-          </a:ln>
         </p:spPr>
       </p:pic>
       <p:pic>
         <p:nvPicPr>
-          <p:cNvPr id="8" name="Рисунок 7">
+          <p:cNvPr id="4" name="Рисунок 3">
             <a:extLst>
               <a:ext uri="{FF2B5EF4-FFF2-40B4-BE49-F238E27FC236}">
-                <a16:creationId xmlns:a16="http://schemas.microsoft.com/office/drawing/2014/main" id="{013D278C-0491-7C7D-048C-D2110731C355}"/>
+                <a16:creationId xmlns:a16="http://schemas.microsoft.com/office/drawing/2014/main" id="{EF4ED30E-7BE6-A9BB-C876-05C3D8FBAB43}"/>
               </a:ext>
             </a:extLst>
           </p:cNvPr>
@@ -9997,8 +10927,8 @@
         </p:blipFill>
         <p:spPr>
           <a:xfrm>
-            <a:off x="5157218" y="1039353"/>
-            <a:ext cx="3113581" cy="3939912"/>
+            <a:off x="3865623" y="1507348"/>
+            <a:ext cx="4945521" cy="2126806"/>
           </a:xfrm>
           <a:prstGeom prst="rect">
             <a:avLst/>
@@ -10023,7 +10953,319 @@
 </p:sld>
 </file>
 
-<file path=ppt/slides/slide19.xml><?xml version="1.0" encoding="utf-8"?>
+<file path=ppt/slides/slide2.xml><?xml version="1.0" encoding="utf-8"?>
+<p:sld xmlns:a="http://schemas.openxmlformats.org/drawingml/2006/main" xmlns:r="http://schemas.openxmlformats.org/officeDocument/2006/relationships" xmlns:p="http://schemas.openxmlformats.org/presentationml/2006/main">
+  <p:cSld>
+    <p:bg>
+      <p:bgPr>
+        <a:solidFill>
+          <a:schemeClr val="lt1"/>
+        </a:solidFill>
+        <a:effectLst/>
+      </p:bgPr>
+    </p:bg>
+    <p:spTree>
+      <p:nvGrpSpPr>
+        <p:cNvPr id="1" name="Shape 282"/>
+        <p:cNvGrpSpPr/>
+        <p:nvPr/>
+      </p:nvGrpSpPr>
+      <p:grpSpPr>
+        <a:xfrm>
+          <a:off x="0" y="0"/>
+          <a:ext cx="0" cy="0"/>
+          <a:chOff x="0" y="0"/>
+          <a:chExt cx="0" cy="0"/>
+        </a:xfrm>
+      </p:grpSpPr>
+      <p:sp>
+        <p:nvSpPr>
+          <p:cNvPr id="283" name="Google Shape;283;p59"/>
+          <p:cNvSpPr txBox="1"/>
+          <p:nvPr/>
+        </p:nvSpPr>
+        <p:spPr>
+          <a:xfrm>
+            <a:off x="247783" y="1316021"/>
+            <a:ext cx="8171755" cy="1575816"/>
+          </a:xfrm>
+          <a:prstGeom prst="rect">
+            <a:avLst/>
+          </a:prstGeom>
+          <a:noFill/>
+          <a:ln>
+            <a:noFill/>
+          </a:ln>
+        </p:spPr>
+        <p:txBody>
+          <a:bodyPr spcFirstLastPara="1" wrap="square" lIns="0" tIns="0" rIns="0" bIns="0" anchor="t" anchorCtr="0">
+            <a:spAutoFit/>
+          </a:bodyPr>
+          <a:lstStyle/>
+          <a:p>
+            <a:pPr marL="190500" lvl="1">
+              <a:lnSpc>
+                <a:spcPct val="160000"/>
+              </a:lnSpc>
+              <a:buClr>
+                <a:srgbClr val="333333"/>
+              </a:buClr>
+              <a:buSzPts val="1000"/>
+            </a:pPr>
+            <a:r>
+              <a:rPr lang="ru-RU" sz="1600" dirty="0">
+                <a:latin typeface="Manrope"/>
+                <a:ea typeface="Manrope"/>
+                <a:cs typeface="Manrope"/>
+              </a:rPr>
+              <a:t>В задачи курсового проекта входят:</a:t>
+            </a:r>
+          </a:p>
+          <a:p>
+            <a:pPr marL="190500" lvl="1">
+              <a:lnSpc>
+                <a:spcPct val="160000"/>
+              </a:lnSpc>
+              <a:buClr>
+                <a:srgbClr val="333333"/>
+              </a:buClr>
+              <a:buSzPts val="1000"/>
+            </a:pPr>
+            <a:r>
+              <a:rPr lang="ru-RU" sz="1600" dirty="0">
+                <a:latin typeface="Manrope"/>
+                <a:ea typeface="Manrope"/>
+                <a:cs typeface="Manrope"/>
+              </a:rPr>
+              <a:t>1. Анализ предметной области.</a:t>
+            </a:r>
+          </a:p>
+          <a:p>
+            <a:pPr marL="190500" lvl="1">
+              <a:lnSpc>
+                <a:spcPct val="160000"/>
+              </a:lnSpc>
+              <a:buClr>
+                <a:srgbClr val="333333"/>
+              </a:buClr>
+              <a:buSzPts val="1000"/>
+            </a:pPr>
+            <a:r>
+              <a:rPr lang="ru-RU" sz="1600" dirty="0">
+                <a:latin typeface="Manrope"/>
+                <a:ea typeface="Manrope"/>
+                <a:cs typeface="Manrope"/>
+              </a:rPr>
+              <a:t>2. Проектирование и разработка реляционной базы данных.</a:t>
+            </a:r>
+          </a:p>
+          <a:p>
+            <a:pPr marL="190500" lvl="1">
+              <a:lnSpc>
+                <a:spcPct val="160000"/>
+              </a:lnSpc>
+              <a:buClr>
+                <a:srgbClr val="333333"/>
+              </a:buClr>
+              <a:buSzPts val="1000"/>
+            </a:pPr>
+            <a:r>
+              <a:rPr lang="ru-RU" sz="1600" dirty="0">
+                <a:latin typeface="Manrope"/>
+                <a:ea typeface="Manrope"/>
+                <a:cs typeface="Manrope"/>
+              </a:rPr>
+              <a:t>3. Реализация программных компонентов</a:t>
+            </a:r>
+          </a:p>
+        </p:txBody>
+      </p:sp>
+      <p:sp>
+        <p:nvSpPr>
+          <p:cNvPr id="285" name="Google Shape;285;p59"/>
+          <p:cNvSpPr txBox="1">
+            <a:spLocks noGrp="1"/>
+          </p:cNvSpPr>
+          <p:nvPr>
+            <p:ph type="title"/>
+          </p:nvPr>
+        </p:nvSpPr>
+        <p:spPr>
+          <a:xfrm>
+            <a:off x="452624" y="519953"/>
+            <a:ext cx="6450199" cy="409672"/>
+          </a:xfrm>
+          <a:prstGeom prst="rect">
+            <a:avLst/>
+          </a:prstGeom>
+        </p:spPr>
+        <p:txBody>
+          <a:bodyPr spcFirstLastPara="1" wrap="square" lIns="0" tIns="91425" rIns="91425" bIns="91425" anchor="ctr" anchorCtr="0">
+            <a:noAutofit/>
+          </a:bodyPr>
+          <a:lstStyle/>
+          <a:p>
+            <a:pPr marL="0" lvl="0" indent="0" algn="l" rtl="0">
+              <a:spcBef>
+                <a:spcPts val="0"/>
+              </a:spcBef>
+              <a:spcAft>
+                <a:spcPts val="0"/>
+              </a:spcAft>
+              <a:buNone/>
+            </a:pPr>
+            <a:r>
+              <a:rPr lang="ru-RU" sz="2000" dirty="0"/>
+              <a:t>Задачи курсового проектирования</a:t>
+            </a:r>
+            <a:endParaRPr sz="2000" dirty="0"/>
+          </a:p>
+        </p:txBody>
+      </p:sp>
+    </p:spTree>
+  </p:cSld>
+  <p:clrMapOvr>
+    <a:masterClrMapping/>
+  </p:clrMapOvr>
+</p:sld>
+</file>
+
+<file path=ppt/slides/slide20.xml><?xml version="1.0" encoding="utf-8"?>
+<p:sld xmlns:a="http://schemas.openxmlformats.org/drawingml/2006/main" xmlns:r="http://schemas.openxmlformats.org/officeDocument/2006/relationships" xmlns:p="http://schemas.openxmlformats.org/presentationml/2006/main">
+  <p:cSld>
+    <p:spTree>
+      <p:nvGrpSpPr>
+        <p:cNvPr id="1" name="">
+          <a:extLst>
+            <a:ext uri="{FF2B5EF4-FFF2-40B4-BE49-F238E27FC236}">
+              <a16:creationId xmlns:a16="http://schemas.microsoft.com/office/drawing/2014/main" id="{A8247733-1EE6-7730-2C4A-F3A298E2B3BB}"/>
+            </a:ext>
+          </a:extLst>
+        </p:cNvPr>
+        <p:cNvGrpSpPr/>
+        <p:nvPr/>
+      </p:nvGrpSpPr>
+      <p:grpSpPr>
+        <a:xfrm>
+          <a:off x="0" y="0"/>
+          <a:ext cx="0" cy="0"/>
+          <a:chOff x="0" y="0"/>
+          <a:chExt cx="0" cy="0"/>
+        </a:xfrm>
+      </p:grpSpPr>
+      <p:sp>
+        <p:nvSpPr>
+          <p:cNvPr id="2" name="Заголовок 1">
+            <a:extLst>
+              <a:ext uri="{FF2B5EF4-FFF2-40B4-BE49-F238E27FC236}">
+                <a16:creationId xmlns:a16="http://schemas.microsoft.com/office/drawing/2014/main" id="{6ECB3CE1-D49E-9437-2B1E-1514BBFAEF7D}"/>
+              </a:ext>
+            </a:extLst>
+          </p:cNvPr>
+          <p:cNvSpPr>
+            <a:spLocks noGrp="1"/>
+          </p:cNvSpPr>
+          <p:nvPr>
+            <p:ph type="title"/>
+          </p:nvPr>
+        </p:nvSpPr>
+        <p:spPr>
+          <a:xfrm>
+            <a:off x="452624" y="512064"/>
+            <a:ext cx="6825999" cy="417561"/>
+          </a:xfrm>
+        </p:spPr>
+        <p:txBody>
+          <a:bodyPr>
+            <a:noAutofit/>
+          </a:bodyPr>
+          <a:lstStyle/>
+          <a:p>
+            <a:r>
+              <a:rPr lang="ru-RU" sz="2400" dirty="0"/>
+              <a:t>Курсор </a:t>
+            </a:r>
+            <a:r>
+              <a:rPr lang="en-US" dirty="0" err="1"/>
+              <a:t>calculate_scholarship_for_group</a:t>
+            </a:r>
+            <a:r>
+              <a:rPr lang="en-US" dirty="0"/>
+              <a:t> </a:t>
+            </a:r>
+            <a:endParaRPr lang="ru-RU" sz="2400" dirty="0"/>
+          </a:p>
+        </p:txBody>
+      </p:sp>
+      <p:pic>
+        <p:nvPicPr>
+          <p:cNvPr id="1026" name="Рисунок 1">
+            <a:extLst>
+              <a:ext uri="{FF2B5EF4-FFF2-40B4-BE49-F238E27FC236}">
+                <a16:creationId xmlns:a16="http://schemas.microsoft.com/office/drawing/2014/main" id="{0A5D373E-BB51-611E-CCFD-0288F03F4565}"/>
+              </a:ext>
+            </a:extLst>
+          </p:cNvPr>
+          <p:cNvPicPr>
+            <a:picLocks noChangeAspect="1" noChangeArrowheads="1"/>
+          </p:cNvPicPr>
+          <p:nvPr/>
+        </p:nvPicPr>
+        <p:blipFill>
+          <a:blip r:embed="rId2">
+            <a:extLst>
+              <a:ext uri="{28A0092B-C50C-407E-A947-70E740481C1C}">
+                <a14:useLocalDpi xmlns:a14="http://schemas.microsoft.com/office/drawing/2010/main" val="0"/>
+              </a:ext>
+            </a:extLst>
+          </a:blip>
+          <a:srcRect/>
+          <a:stretch>
+            <a:fillRect/>
+          </a:stretch>
+        </p:blipFill>
+        <p:spPr bwMode="auto">
+          <a:xfrm>
+            <a:off x="729595" y="1568372"/>
+            <a:ext cx="7684810" cy="2518981"/>
+          </a:xfrm>
+          <a:prstGeom prst="rect">
+            <a:avLst/>
+          </a:prstGeom>
+          <a:noFill/>
+          <a:ln w="9525">
+            <a:solidFill>
+              <a:srgbClr val="000000"/>
+            </a:solidFill>
+            <a:miter lim="800000"/>
+            <a:headEnd/>
+            <a:tailEnd/>
+          </a:ln>
+          <a:extLst>
+            <a:ext uri="{909E8E84-426E-40DD-AFC4-6F175D3DCCD1}">
+              <a14:hiddenFill xmlns:a14="http://schemas.microsoft.com/office/drawing/2010/main">
+                <a:solidFill>
+                  <a:srgbClr val="FFFFFF"/>
+                </a:solidFill>
+              </a14:hiddenFill>
+            </a:ext>
+          </a:extLst>
+        </p:spPr>
+      </p:pic>
+    </p:spTree>
+    <p:extLst>
+      <p:ext uri="{BB962C8B-B14F-4D97-AF65-F5344CB8AC3E}">
+        <p14:creationId xmlns:p14="http://schemas.microsoft.com/office/powerpoint/2010/main" val="611322734"/>
+      </p:ext>
+    </p:extLst>
+  </p:cSld>
+  <p:clrMapOvr>
+    <a:masterClrMapping/>
+  </p:clrMapOvr>
+</p:sld>
+</file>
+
+<file path=ppt/slides/slide21.xml><?xml version="1.0" encoding="utf-8"?>
 <p:sld xmlns:a="http://schemas.openxmlformats.org/drawingml/2006/main" xmlns:r="http://schemas.openxmlformats.org/officeDocument/2006/relationships" xmlns:p="http://schemas.openxmlformats.org/presentationml/2006/main">
   <p:cSld>
     <p:spTree>
@@ -10115,7 +11357,7 @@
               <a:rPr lang="ru-RU" sz="1600" dirty="0">
                 <a:latin typeface="Manrope"/>
               </a:rPr>
-              <a:t>информационной системы «Поликлиника».</a:t>
+              <a:t>информационной системы «Деканат».</a:t>
             </a:r>
           </a:p>
           <a:p>
@@ -10143,64 +11385,55 @@
                 <a:cs typeface="Manrope"/>
                 <a:sym typeface="Manrope"/>
               </a:rPr>
-              <a:t>Разработанная база-данных выполняет следующие задачи:</a:t>
+              <a:t>Разработанная база данных выполняет задачи:</a:t>
             </a:r>
           </a:p>
           <a:p>
-            <a:pPr lvl="1">
+            <a:pPr lvl="0">
               <a:lnSpc>
                 <a:spcPct val="160000"/>
               </a:lnSpc>
-              <a:buClr>
-                <a:srgbClr val="333333"/>
-              </a:buClr>
-              <a:buSzPts val="1000"/>
             </a:pPr>
             <a:r>
               <a:rPr lang="ru-RU" sz="1600" dirty="0">
                 <a:latin typeface="Manrope"/>
                 <a:ea typeface="Manrope"/>
                 <a:cs typeface="Manrope"/>
+                <a:sym typeface="Manrope"/>
               </a:rPr>
-              <a:t>1. повышение качества медицинского обслуживания;</a:t>
+              <a:t>1. Повышение качества учёта успеваемости студентов.</a:t>
             </a:r>
           </a:p>
           <a:p>
-            <a:pPr lvl="1">
+            <a:pPr lvl="0">
               <a:lnSpc>
                 <a:spcPct val="160000"/>
               </a:lnSpc>
-              <a:buClr>
-                <a:srgbClr val="333333"/>
-              </a:buClr>
-              <a:buSzPts val="1000"/>
             </a:pPr>
             <a:r>
               <a:rPr lang="ru-RU" sz="1600" dirty="0">
                 <a:latin typeface="Manrope"/>
                 <a:ea typeface="Manrope"/>
                 <a:cs typeface="Manrope"/>
+                <a:sym typeface="Manrope"/>
               </a:rPr>
-              <a:t>2.оптимизация рабочих процессов;</a:t>
+              <a:t>2. Оптимизация рабочих процессов.</a:t>
             </a:r>
           </a:p>
           <a:p>
-            <a:pPr lvl="1">
+            <a:pPr lvl="0">
               <a:lnSpc>
                 <a:spcPct val="160000"/>
               </a:lnSpc>
-              <a:buClr>
-                <a:srgbClr val="333333"/>
-              </a:buClr>
-              <a:buSzPts val="1000"/>
             </a:pPr>
             <a:r>
               <a:rPr lang="ru-RU" sz="1600" dirty="0">
                 <a:latin typeface="Manrope"/>
                 <a:ea typeface="Manrope"/>
                 <a:cs typeface="Manrope"/>
+                <a:sym typeface="Manrope"/>
               </a:rPr>
-              <a:t>3. создание единого информационного пространства.</a:t>
+              <a:t>3. Создание информационного пространства.</a:t>
             </a:r>
           </a:p>
           <a:p>
@@ -10224,227 +11457,6 @@
         <p14:creationId xmlns:p14="http://schemas.microsoft.com/office/powerpoint/2010/main" val="828352361"/>
       </p:ext>
     </p:extLst>
-  </p:cSld>
-  <p:clrMapOvr>
-    <a:masterClrMapping/>
-  </p:clrMapOvr>
-</p:sld>
-</file>
-
-<file path=ppt/slides/slide2.xml><?xml version="1.0" encoding="utf-8"?>
-<p:sld xmlns:a="http://schemas.openxmlformats.org/drawingml/2006/main" xmlns:r="http://schemas.openxmlformats.org/officeDocument/2006/relationships" xmlns:p="http://schemas.openxmlformats.org/presentationml/2006/main">
-  <p:cSld>
-    <p:bg>
-      <p:bgPr>
-        <a:solidFill>
-          <a:schemeClr val="lt1"/>
-        </a:solidFill>
-        <a:effectLst/>
-      </p:bgPr>
-    </p:bg>
-    <p:spTree>
-      <p:nvGrpSpPr>
-        <p:cNvPr id="1" name="Shape 282"/>
-        <p:cNvGrpSpPr/>
-        <p:nvPr/>
-      </p:nvGrpSpPr>
-      <p:grpSpPr>
-        <a:xfrm>
-          <a:off x="0" y="0"/>
-          <a:ext cx="0" cy="0"/>
-          <a:chOff x="0" y="0"/>
-          <a:chExt cx="0" cy="0"/>
-        </a:xfrm>
-      </p:grpSpPr>
-      <p:sp>
-        <p:nvSpPr>
-          <p:cNvPr id="283" name="Google Shape;283;p59"/>
-          <p:cNvSpPr txBox="1"/>
-          <p:nvPr/>
-        </p:nvSpPr>
-        <p:spPr>
-          <a:xfrm>
-            <a:off x="247783" y="1316021"/>
-            <a:ext cx="8171755" cy="2511457"/>
-          </a:xfrm>
-          <a:prstGeom prst="rect">
-            <a:avLst/>
-          </a:prstGeom>
-          <a:noFill/>
-          <a:ln>
-            <a:noFill/>
-          </a:ln>
-        </p:spPr>
-        <p:txBody>
-          <a:bodyPr spcFirstLastPara="1" wrap="square" lIns="0" tIns="0" rIns="0" bIns="0" anchor="t" anchorCtr="0">
-            <a:spAutoFit/>
-          </a:bodyPr>
-          <a:lstStyle/>
-          <a:p>
-            <a:pPr marL="190500" lvl="1">
-              <a:lnSpc>
-                <a:spcPct val="160000"/>
-              </a:lnSpc>
-              <a:buClr>
-                <a:srgbClr val="333333"/>
-              </a:buClr>
-              <a:buSzPts val="1000"/>
-            </a:pPr>
-            <a:r>
-              <a:rPr lang="ru-RU" sz="1600" dirty="0">
-                <a:latin typeface="Manrope"/>
-                <a:ea typeface="Manrope"/>
-                <a:cs typeface="Manrope"/>
-              </a:rPr>
-              <a:t>В задачи курсового проекта входят:</a:t>
-            </a:r>
-          </a:p>
-          <a:p>
-            <a:pPr marL="190500" lvl="1">
-              <a:lnSpc>
-                <a:spcPct val="160000"/>
-              </a:lnSpc>
-              <a:buClr>
-                <a:srgbClr val="333333"/>
-              </a:buClr>
-              <a:buSzPts val="1000"/>
-            </a:pPr>
-            <a:r>
-              <a:rPr lang="ru-RU" sz="1600" dirty="0">
-                <a:latin typeface="Manrope"/>
-              </a:rPr>
-              <a:t>1. анализ предметной области;</a:t>
-            </a:r>
-          </a:p>
-          <a:p>
-            <a:pPr marL="190500" lvl="1">
-              <a:lnSpc>
-                <a:spcPct val="160000"/>
-              </a:lnSpc>
-              <a:buClr>
-                <a:srgbClr val="333333"/>
-              </a:buClr>
-              <a:buSzPts val="1000"/>
-            </a:pPr>
-            <a:r>
-              <a:rPr lang="ru-RU" sz="1600" dirty="0">
-                <a:latin typeface="Manrope"/>
-              </a:rPr>
-              <a:t>2. проектирование и разработка реляционной базы данных;</a:t>
-            </a:r>
-          </a:p>
-          <a:p>
-            <a:pPr marL="190500" lvl="1">
-              <a:lnSpc>
-                <a:spcPct val="160000"/>
-              </a:lnSpc>
-              <a:buClr>
-                <a:srgbClr val="333333"/>
-              </a:buClr>
-              <a:buSzPts val="1000"/>
-            </a:pPr>
-            <a:r>
-              <a:rPr lang="ru-RU" sz="1600" dirty="0">
-                <a:latin typeface="Manrope"/>
-              </a:rPr>
-              <a:t>3. реализация программных компонентов.</a:t>
-            </a:r>
-          </a:p>
-          <a:p>
-            <a:pPr marL="190500" lvl="1">
-              <a:lnSpc>
-                <a:spcPct val="160000"/>
-              </a:lnSpc>
-              <a:buClr>
-                <a:srgbClr val="333333"/>
-              </a:buClr>
-              <a:buSzPts val="1000"/>
-            </a:pPr>
-            <a:endParaRPr lang="ru-RU" dirty="0"/>
-          </a:p>
-          <a:p>
-            <a:pPr marL="190500" lvl="1">
-              <a:lnSpc>
-                <a:spcPct val="160000"/>
-              </a:lnSpc>
-              <a:buClr>
-                <a:srgbClr val="333333"/>
-              </a:buClr>
-              <a:buSzPts val="1000"/>
-            </a:pPr>
-            <a:endParaRPr lang="ru-RU" dirty="0"/>
-          </a:p>
-          <a:p>
-            <a:pPr marL="190500" marR="0" lvl="1" algn="l" rtl="0">
-              <a:lnSpc>
-                <a:spcPct val="160000"/>
-              </a:lnSpc>
-              <a:spcBef>
-                <a:spcPts val="0"/>
-              </a:spcBef>
-              <a:spcAft>
-                <a:spcPts val="0"/>
-              </a:spcAft>
-              <a:buClr>
-                <a:srgbClr val="333333"/>
-              </a:buClr>
-              <a:buSzPts val="1000"/>
-            </a:pPr>
-            <a:endParaRPr sz="1000" dirty="0">
-              <a:solidFill>
-                <a:srgbClr val="333333"/>
-              </a:solidFill>
-              <a:latin typeface="Manrope Medium"/>
-              <a:ea typeface="Manrope Medium"/>
-              <a:cs typeface="Manrope Medium"/>
-              <a:sym typeface="Manrope Medium"/>
-            </a:endParaRPr>
-          </a:p>
-        </p:txBody>
-      </p:sp>
-      <p:sp>
-        <p:nvSpPr>
-          <p:cNvPr id="285" name="Google Shape;285;p59"/>
-          <p:cNvSpPr txBox="1">
-            <a:spLocks noGrp="1"/>
-          </p:cNvSpPr>
-          <p:nvPr>
-            <p:ph type="title"/>
-          </p:nvPr>
-        </p:nvSpPr>
-        <p:spPr>
-          <a:xfrm>
-            <a:off x="452624" y="519953"/>
-            <a:ext cx="6450199" cy="409672"/>
-          </a:xfrm>
-          <a:prstGeom prst="rect">
-            <a:avLst/>
-          </a:prstGeom>
-        </p:spPr>
-        <p:txBody>
-          <a:bodyPr spcFirstLastPara="1" wrap="square" lIns="0" tIns="91425" rIns="91425" bIns="91425" anchor="ctr" anchorCtr="0">
-            <a:noAutofit/>
-          </a:bodyPr>
-          <a:lstStyle/>
-          <a:p>
-            <a:pPr marL="0" lvl="0" indent="0" algn="l" rtl="0">
-              <a:spcBef>
-                <a:spcPts val="0"/>
-              </a:spcBef>
-              <a:spcAft>
-                <a:spcPts val="0"/>
-              </a:spcAft>
-              <a:buNone/>
-            </a:pPr>
-            <a:r>
-              <a:rPr lang="ru-RU" sz="2000" dirty="0"/>
-              <a:t>Задачи курсового проектирования</a:t>
-            </a:r>
-            <a:endParaRPr sz="2000" dirty="0"/>
-          </a:p>
-        </p:txBody>
-      </p:sp>
-    </p:spTree>
   </p:cSld>
   <p:clrMapOvr>
     <a:masterClrMapping/>
@@ -10514,7 +11526,7 @@
                 <a:ea typeface="Manrope"/>
                 <a:cs typeface="Manrope"/>
               </a:rPr>
-              <a:t>На начальном этапе были выделены и нормализованы сущности базы данных:</a:t>
+              <a:t>На начальном этапе были выделены следующие сущности БД:</a:t>
             </a:r>
           </a:p>
           <a:p>
@@ -10530,7 +11542,7 @@
                 <a:ea typeface="Manrope"/>
                 <a:cs typeface="Manrope"/>
               </a:rPr>
-              <a:t>1. пациенты;</a:t>
+              <a:t>1. Студенты</a:t>
             </a:r>
           </a:p>
           <a:p>
@@ -10546,7 +11558,7 @@
                 <a:ea typeface="Manrope"/>
                 <a:cs typeface="Manrope"/>
               </a:rPr>
-              <a:t>2. врачи;</a:t>
+              <a:t>2. Группы</a:t>
             </a:r>
           </a:p>
           <a:p>
@@ -10562,7 +11574,7 @@
                 <a:ea typeface="Manrope"/>
                 <a:cs typeface="Manrope"/>
               </a:rPr>
-              <a:t>3. записи о лечении;</a:t>
+              <a:t>3. Направления обучения (специальности)</a:t>
             </a:r>
           </a:p>
           <a:p>
@@ -10578,7 +11590,7 @@
                 <a:ea typeface="Manrope"/>
                 <a:cs typeface="Manrope"/>
               </a:rPr>
-              <a:t>4. диагнозы;</a:t>
+              <a:t>4. Дисциплины (предметы)</a:t>
             </a:r>
           </a:p>
           <a:p>
@@ -10594,7 +11606,7 @@
                 <a:ea typeface="Manrope"/>
                 <a:cs typeface="Manrope"/>
               </a:rPr>
-              <a:t>5. диспансерное наблюдение.</a:t>
+              <a:t>5. Сессионная успеваемость</a:t>
             </a:r>
           </a:p>
         </p:txBody>
@@ -10710,15 +11722,15 @@
       </p:sp>
       <p:pic>
         <p:nvPicPr>
-          <p:cNvPr id="1026" name="Рисунок 1">
+          <p:cNvPr id="4" name="Рисунок 3">
             <a:extLst>
               <a:ext uri="{FF2B5EF4-FFF2-40B4-BE49-F238E27FC236}">
-                <a16:creationId xmlns:a16="http://schemas.microsoft.com/office/drawing/2014/main" id="{89629002-9FEE-10DE-596B-252625E5C757}"/>
+                <a16:creationId xmlns:a16="http://schemas.microsoft.com/office/drawing/2014/main" id="{677EA79A-F05E-1935-79F6-CA18EE6EA4C1}"/>
               </a:ext>
             </a:extLst>
           </p:cNvPr>
           <p:cNvPicPr>
-            <a:picLocks noChangeAspect="1" noChangeArrowheads="1"/>
+            <a:picLocks noChangeAspect="1"/>
           </p:cNvPicPr>
           <p:nvPr/>
         </p:nvPicPr>
@@ -10730,37 +11742,25 @@
               </a:ext>
             </a:extLst>
           </a:blip>
-          <a:srcRect/>
           <a:stretch>
             <a:fillRect/>
           </a:stretch>
         </p:blipFill>
-        <p:spPr bwMode="auto">
+        <p:spPr>
           <a:xfrm>
-            <a:off x="1767875" y="1039353"/>
-            <a:ext cx="5298850" cy="3918882"/>
+            <a:off x="2072106" y="929625"/>
+            <a:ext cx="4843306" cy="4213875"/>
           </a:xfrm>
           <a:prstGeom prst="rect">
             <a:avLst/>
           </a:prstGeom>
-          <a:noFill/>
-          <a:ln w="9525">
+          <a:ln>
             <a:solidFill>
-              <a:srgbClr val="000000"/>
+              <a:schemeClr val="bg1">
+                <a:lumMod val="10000"/>
+              </a:schemeClr>
             </a:solidFill>
-            <a:miter lim="800000"/>
-            <a:headEnd/>
-            <a:tailEnd/>
           </a:ln>
-          <a:extLst>
-            <a:ext uri="{909E8E84-426E-40DD-AFC4-6F175D3DCCD1}">
-              <a14:hiddenFill xmlns:a14="http://schemas.microsoft.com/office/drawing/2010/main">
-                <a:solidFill>
-                  <a:srgbClr val="FFFFFF"/>
-                </a:solidFill>
-              </a14:hiddenFill>
-            </a:ext>
-          </a:extLst>
         </p:spPr>
       </p:pic>
     </p:spTree>
@@ -10836,15 +11836,15 @@
       </p:sp>
       <p:pic>
         <p:nvPicPr>
-          <p:cNvPr id="2050" name="Рисунок 1">
+          <p:cNvPr id="2" name="Рисунок 1">
             <a:extLst>
               <a:ext uri="{FF2B5EF4-FFF2-40B4-BE49-F238E27FC236}">
-                <a16:creationId xmlns:a16="http://schemas.microsoft.com/office/drawing/2014/main" id="{3CBB9D12-AF52-F4AC-1F80-56B97B9038F5}"/>
+                <a16:creationId xmlns:a16="http://schemas.microsoft.com/office/drawing/2014/main" id="{F23C2EB6-6973-EBF2-FB0C-DA9F158EA877}"/>
               </a:ext>
             </a:extLst>
           </p:cNvPr>
           <p:cNvPicPr>
-            <a:picLocks noChangeAspect="1" noChangeArrowheads="1"/>
+            <a:picLocks noChangeAspect="1"/>
           </p:cNvPicPr>
           <p:nvPr/>
         </p:nvPicPr>
@@ -10856,37 +11856,25 @@
               </a:ext>
             </a:extLst>
           </a:blip>
-          <a:srcRect/>
           <a:stretch>
             <a:fillRect/>
           </a:stretch>
         </p:blipFill>
-        <p:spPr bwMode="auto">
+        <p:spPr>
           <a:xfrm>
-            <a:off x="1822702" y="1039353"/>
-            <a:ext cx="5280899" cy="3980358"/>
+            <a:off x="1000297" y="929625"/>
+            <a:ext cx="7143406" cy="4213875"/>
           </a:xfrm>
           <a:prstGeom prst="rect">
             <a:avLst/>
           </a:prstGeom>
-          <a:noFill/>
-          <a:ln w="9525">
+          <a:ln>
             <a:solidFill>
-              <a:srgbClr val="000000"/>
+              <a:schemeClr val="bg1">
+                <a:lumMod val="10000"/>
+              </a:schemeClr>
             </a:solidFill>
-            <a:miter lim="800000"/>
-            <a:headEnd/>
-            <a:tailEnd/>
           </a:ln>
-          <a:extLst>
-            <a:ext uri="{909E8E84-426E-40DD-AFC4-6F175D3DCCD1}">
-              <a14:hiddenFill xmlns:a14="http://schemas.microsoft.com/office/drawing/2010/main">
-                <a:solidFill>
-                  <a:srgbClr val="FFFFFF"/>
-                </a:solidFill>
-              </a14:hiddenFill>
-            </a:ext>
-          </a:extLst>
         </p:spPr>
       </p:pic>
     </p:spTree>
@@ -10943,22 +11931,14 @@
           </a:bodyPr>
           <a:lstStyle/>
           <a:p>
-            <a:pPr marL="0" lvl="0" indent="0" algn="l" rtl="0">
-              <a:spcBef>
-                <a:spcPts val="0"/>
-              </a:spcBef>
-              <a:spcAft>
-                <a:spcPts val="0"/>
-              </a:spcAft>
-              <a:buNone/>
-            </a:pPr>
+            <a:pPr lvl="0"/>
             <a:r>
               <a:rPr lang="ru-RU" dirty="0"/>
               <a:t>Таблица </a:t>
             </a:r>
             <a:r>
-              <a:rPr lang="en-US" dirty="0"/>
-              <a:t>Patient</a:t>
+              <a:rPr lang="en-US" dirty="0" err="1"/>
+              <a:t>spetialties</a:t>
             </a:r>
             <a:endParaRPr dirty="0"/>
           </a:p>
@@ -10966,112 +11946,76 @@
       </p:sp>
       <p:pic>
         <p:nvPicPr>
-          <p:cNvPr id="3074" name="Рисунок 1">
+          <p:cNvPr id="2" name="Рисунок 1">
             <a:extLst>
               <a:ext uri="{FF2B5EF4-FFF2-40B4-BE49-F238E27FC236}">
-                <a16:creationId xmlns:a16="http://schemas.microsoft.com/office/drawing/2014/main" id="{E8C38A36-2055-A461-F87A-49F12D9933B2}"/>
+                <a16:creationId xmlns:a16="http://schemas.microsoft.com/office/drawing/2014/main" id="{E736A0F0-F182-8D5D-8157-1B6E1EF991F7}"/>
               </a:ext>
             </a:extLst>
           </p:cNvPr>
           <p:cNvPicPr>
-            <a:picLocks noChangeAspect="1" noChangeArrowheads="1"/>
+            <a:picLocks noChangeAspect="1"/>
           </p:cNvPicPr>
           <p:nvPr/>
         </p:nvPicPr>
         <p:blipFill>
-          <a:blip r:embed="rId3">
-            <a:extLst>
-              <a:ext uri="{28A0092B-C50C-407E-A947-70E740481C1C}">
-                <a14:useLocalDpi xmlns:a14="http://schemas.microsoft.com/office/drawing/2010/main" val="0"/>
-              </a:ext>
-            </a:extLst>
-          </a:blip>
-          <a:srcRect/>
+          <a:blip r:embed="rId3"/>
           <a:stretch>
             <a:fillRect/>
           </a:stretch>
         </p:blipFill>
-        <p:spPr bwMode="auto">
+        <p:spPr>
           <a:xfrm>
-            <a:off x="2149284" y="1074796"/>
-            <a:ext cx="4845431" cy="1351783"/>
+            <a:off x="1113942" y="1092182"/>
+            <a:ext cx="6916115" cy="1314633"/>
           </a:xfrm>
           <a:prstGeom prst="rect">
             <a:avLst/>
           </a:prstGeom>
-          <a:noFill/>
-          <a:ln w="9525">
+          <a:ln>
             <a:solidFill>
-              <a:srgbClr val="000000"/>
+              <a:schemeClr val="bg1">
+                <a:lumMod val="10000"/>
+              </a:schemeClr>
             </a:solidFill>
-            <a:miter lim="800000"/>
-            <a:headEnd/>
-            <a:tailEnd/>
           </a:ln>
-          <a:extLst>
-            <a:ext uri="{909E8E84-426E-40DD-AFC4-6F175D3DCCD1}">
-              <a14:hiddenFill xmlns:a14="http://schemas.microsoft.com/office/drawing/2010/main">
-                <a:solidFill>
-                  <a:srgbClr val="FFFFFF"/>
-                </a:solidFill>
-              </a14:hiddenFill>
-            </a:ext>
-          </a:extLst>
         </p:spPr>
       </p:pic>
       <p:pic>
         <p:nvPicPr>
-          <p:cNvPr id="3075" name="Рисунок 1">
+          <p:cNvPr id="3" name="Рисунок 2">
             <a:extLst>
               <a:ext uri="{FF2B5EF4-FFF2-40B4-BE49-F238E27FC236}">
-                <a16:creationId xmlns:a16="http://schemas.microsoft.com/office/drawing/2014/main" id="{6932BE54-DF47-251E-2B54-473D2FDFEEC8}"/>
+                <a16:creationId xmlns:a16="http://schemas.microsoft.com/office/drawing/2014/main" id="{43338B24-5F6A-9807-8E23-293582B87E84}"/>
               </a:ext>
             </a:extLst>
           </p:cNvPr>
           <p:cNvPicPr>
-            <a:picLocks noChangeAspect="1" noChangeArrowheads="1"/>
+            <a:picLocks noChangeAspect="1"/>
           </p:cNvPicPr>
           <p:nvPr/>
         </p:nvPicPr>
         <p:blipFill>
-          <a:blip r:embed="rId4">
-            <a:extLst>
-              <a:ext uri="{28A0092B-C50C-407E-A947-70E740481C1C}">
-                <a14:useLocalDpi xmlns:a14="http://schemas.microsoft.com/office/drawing/2010/main" val="0"/>
-              </a:ext>
-            </a:extLst>
-          </a:blip>
-          <a:srcRect/>
+          <a:blip r:embed="rId4"/>
           <a:stretch>
             <a:fillRect/>
           </a:stretch>
         </p:blipFill>
-        <p:spPr bwMode="auto">
+        <p:spPr>
           <a:xfrm>
-            <a:off x="1789905" y="2571750"/>
-            <a:ext cx="5564188" cy="2370137"/>
+            <a:off x="1113942" y="2569372"/>
+            <a:ext cx="6916115" cy="2471408"/>
           </a:xfrm>
           <a:prstGeom prst="rect">
             <a:avLst/>
           </a:prstGeom>
-          <a:noFill/>
-          <a:ln w="9525">
+          <a:ln>
             <a:solidFill>
-              <a:srgbClr val="000000"/>
+              <a:schemeClr val="bg1">
+                <a:lumMod val="10000"/>
+              </a:schemeClr>
             </a:solidFill>
-            <a:miter lim="800000"/>
-            <a:headEnd/>
-            <a:tailEnd/>
           </a:ln>
-          <a:extLst>
-            <a:ext uri="{909E8E84-426E-40DD-AFC4-6F175D3DCCD1}">
-              <a14:hiddenFill xmlns:a14="http://schemas.microsoft.com/office/drawing/2010/main">
-                <a:solidFill>
-                  <a:srgbClr val="FFFFFF"/>
-                </a:solidFill>
-              </a14:hiddenFill>
-            </a:ext>
-          </a:extLst>
         </p:spPr>
       </p:pic>
     </p:spTree>
@@ -11128,22 +12072,14 @@
           </a:bodyPr>
           <a:lstStyle/>
           <a:p>
-            <a:pPr marL="0" lvl="0" indent="0" algn="l" rtl="0">
-              <a:spcBef>
-                <a:spcPts val="0"/>
-              </a:spcBef>
-              <a:spcAft>
-                <a:spcPts val="0"/>
-              </a:spcAft>
-              <a:buNone/>
-            </a:pPr>
+            <a:pPr lvl="0"/>
             <a:r>
               <a:rPr lang="ru-RU" sz="2000" dirty="0"/>
               <a:t>Таблица </a:t>
             </a:r>
             <a:r>
               <a:rPr lang="en-US" sz="2000" dirty="0"/>
-              <a:t>Doctor</a:t>
+              <a:t>groups</a:t>
             </a:r>
             <a:endParaRPr sz="2000" dirty="0"/>
           </a:p>
@@ -11151,112 +12087,77 @@
       </p:sp>
       <p:pic>
         <p:nvPicPr>
-          <p:cNvPr id="4098" name="Рисунок 1">
+          <p:cNvPr id="2" name="Рисунок 1">
             <a:extLst>
               <a:ext uri="{FF2B5EF4-FFF2-40B4-BE49-F238E27FC236}">
-                <a16:creationId xmlns:a16="http://schemas.microsoft.com/office/drawing/2014/main" id="{317B0163-6080-0AD8-BEAA-4D85F2726A1A}"/>
+                <a16:creationId xmlns:a16="http://schemas.microsoft.com/office/drawing/2014/main" id="{5D7281AD-A73E-0734-74C0-1819E5C9725B}"/>
               </a:ext>
             </a:extLst>
           </p:cNvPr>
           <p:cNvPicPr>
-            <a:picLocks noChangeAspect="1" noChangeArrowheads="1"/>
+            <a:picLocks noChangeAspect="1"/>
           </p:cNvPicPr>
           <p:nvPr/>
         </p:nvPicPr>
         <p:blipFill>
-          <a:blip r:embed="rId3">
-            <a:extLst>
-              <a:ext uri="{28A0092B-C50C-407E-A947-70E740481C1C}">
-                <a14:useLocalDpi xmlns:a14="http://schemas.microsoft.com/office/drawing/2010/main" val="0"/>
-              </a:ext>
-            </a:extLst>
-          </a:blip>
-          <a:srcRect/>
+          <a:blip r:embed="rId3"/>
           <a:stretch>
             <a:fillRect/>
           </a:stretch>
         </p:blipFill>
-        <p:spPr bwMode="auto">
+        <p:spPr>
           <a:xfrm>
-            <a:off x="2401886" y="1192776"/>
-            <a:ext cx="4340225" cy="1287463"/>
+            <a:off x="1132995" y="952274"/>
+            <a:ext cx="6878010" cy="1619476"/>
           </a:xfrm>
           <a:prstGeom prst="rect">
             <a:avLst/>
           </a:prstGeom>
-          <a:noFill/>
-          <a:ln w="9525">
+          <a:ln>
             <a:solidFill>
-              <a:srgbClr val="000000"/>
+              <a:schemeClr val="bg1">
+                <a:lumMod val="10000"/>
+              </a:schemeClr>
             </a:solidFill>
-            <a:miter lim="800000"/>
-            <a:headEnd/>
-            <a:tailEnd/>
           </a:ln>
-          <a:extLst>
-            <a:ext uri="{909E8E84-426E-40DD-AFC4-6F175D3DCCD1}">
-              <a14:hiddenFill xmlns:a14="http://schemas.microsoft.com/office/drawing/2010/main">
-                <a:solidFill>
-                  <a:srgbClr val="FFFFFF"/>
-                </a:solidFill>
-              </a14:hiddenFill>
-            </a:ext>
-          </a:extLst>
         </p:spPr>
       </p:pic>
       <p:pic>
         <p:nvPicPr>
-          <p:cNvPr id="4099" name="Рисунок 1">
+          <p:cNvPr id="3" name="Рисунок 2">
             <a:extLst>
               <a:ext uri="{FF2B5EF4-FFF2-40B4-BE49-F238E27FC236}">
-                <a16:creationId xmlns:a16="http://schemas.microsoft.com/office/drawing/2014/main" id="{B868E410-BDC9-7EA9-83DB-EC50C4D69DD7}"/>
+                <a16:creationId xmlns:a16="http://schemas.microsoft.com/office/drawing/2014/main" id="{FE61970A-5DA9-706E-532D-8F2D55549107}"/>
               </a:ext>
             </a:extLst>
           </p:cNvPr>
           <p:cNvPicPr>
-            <a:picLocks noChangeAspect="1" noChangeArrowheads="1"/>
+            <a:picLocks noChangeAspect="1"/>
           </p:cNvPicPr>
           <p:nvPr/>
         </p:nvPicPr>
         <p:blipFill>
-          <a:blip r:embed="rId4">
-            <a:extLst>
-              <a:ext uri="{28A0092B-C50C-407E-A947-70E740481C1C}">
-                <a14:useLocalDpi xmlns:a14="http://schemas.microsoft.com/office/drawing/2010/main" val="0"/>
-              </a:ext>
-            </a:extLst>
-          </a:blip>
-          <a:srcRect/>
+          <a:blip r:embed="rId4"/>
+          <a:srcRect b="35559"/>
           <a:stretch>
             <a:fillRect/>
           </a:stretch>
         </p:blipFill>
-        <p:spPr bwMode="auto">
+        <p:spPr>
           <a:xfrm>
-            <a:off x="1628773" y="2663262"/>
-            <a:ext cx="5886450" cy="2035175"/>
+            <a:off x="1418267" y="2852105"/>
+            <a:ext cx="6307465" cy="2291395"/>
           </a:xfrm>
           <a:prstGeom prst="rect">
             <a:avLst/>
           </a:prstGeom>
-          <a:noFill/>
-          <a:ln w="9525">
+          <a:ln>
             <a:solidFill>
-              <a:srgbClr val="000000"/>
+              <a:schemeClr val="bg1">
+                <a:lumMod val="10000"/>
+              </a:schemeClr>
             </a:solidFill>
-            <a:miter lim="800000"/>
-            <a:headEnd/>
-            <a:tailEnd/>
           </a:ln>
-          <a:extLst>
-            <a:ext uri="{909E8E84-426E-40DD-AFC4-6F175D3DCCD1}">
-              <a14:hiddenFill xmlns:a14="http://schemas.microsoft.com/office/drawing/2010/main">
-                <a:solidFill>
-                  <a:srgbClr val="FFFFFF"/>
-                </a:solidFill>
-              </a14:hiddenFill>
-            </a:ext>
-          </a:extLst>
         </p:spPr>
       </p:pic>
     </p:spTree>
@@ -11313,22 +12214,14 @@
           </a:bodyPr>
           <a:lstStyle/>
           <a:p>
-            <a:pPr marL="0" lvl="0" indent="0" algn="l" rtl="0">
-              <a:spcBef>
-                <a:spcPts val="0"/>
-              </a:spcBef>
-              <a:spcAft>
-                <a:spcPts val="0"/>
-              </a:spcAft>
-              <a:buNone/>
-            </a:pPr>
+            <a:pPr lvl="0"/>
             <a:r>
               <a:rPr lang="ru-RU" sz="2000" dirty="0"/>
               <a:t>Таблица </a:t>
             </a:r>
             <a:r>
-              <a:rPr lang="en-US" sz="2000" dirty="0" err="1"/>
-              <a:t>Diagnoz</a:t>
+              <a:rPr lang="en-US" sz="2000" dirty="0"/>
+              <a:t>subjects</a:t>
             </a:r>
             <a:endParaRPr sz="2000" dirty="0"/>
           </a:p>
@@ -11336,112 +12229,77 @@
       </p:sp>
       <p:pic>
         <p:nvPicPr>
-          <p:cNvPr id="5122" name="Рисунок 1">
+          <p:cNvPr id="3" name="Рисунок 2">
             <a:extLst>
               <a:ext uri="{FF2B5EF4-FFF2-40B4-BE49-F238E27FC236}">
-                <a16:creationId xmlns:a16="http://schemas.microsoft.com/office/drawing/2014/main" id="{308A1BF9-FA55-312B-29AC-F3C782E56B4E}"/>
+                <a16:creationId xmlns:a16="http://schemas.microsoft.com/office/drawing/2014/main" id="{5B0B6082-B3D4-137D-9A7A-083200A49EB8}"/>
               </a:ext>
             </a:extLst>
           </p:cNvPr>
           <p:cNvPicPr>
-            <a:picLocks noChangeAspect="1" noChangeArrowheads="1"/>
+            <a:picLocks noChangeAspect="1"/>
           </p:cNvPicPr>
           <p:nvPr/>
         </p:nvPicPr>
         <p:blipFill>
-          <a:blip r:embed="rId4">
-            <a:extLst>
-              <a:ext uri="{28A0092B-C50C-407E-A947-70E740481C1C}">
-                <a14:useLocalDpi xmlns:a14="http://schemas.microsoft.com/office/drawing/2010/main" val="0"/>
-              </a:ext>
-            </a:extLst>
-          </a:blip>
-          <a:srcRect/>
+          <a:blip r:embed="rId3"/>
           <a:stretch>
             <a:fillRect/>
           </a:stretch>
         </p:blipFill>
-        <p:spPr bwMode="auto">
+        <p:spPr>
           <a:xfrm>
-            <a:off x="2099466" y="1067054"/>
-            <a:ext cx="4945063" cy="901700"/>
+            <a:off x="1606158" y="1108898"/>
+            <a:ext cx="5931684" cy="1741713"/>
           </a:xfrm>
           <a:prstGeom prst="rect">
             <a:avLst/>
           </a:prstGeom>
-          <a:noFill/>
-          <a:ln w="9525">
+          <a:ln>
             <a:solidFill>
-              <a:srgbClr val="000000"/>
+              <a:schemeClr val="bg1">
+                <a:lumMod val="10000"/>
+              </a:schemeClr>
             </a:solidFill>
-            <a:miter lim="800000"/>
-            <a:headEnd/>
-            <a:tailEnd/>
           </a:ln>
-          <a:extLst>
-            <a:ext uri="{909E8E84-426E-40DD-AFC4-6F175D3DCCD1}">
-              <a14:hiddenFill xmlns:a14="http://schemas.microsoft.com/office/drawing/2010/main">
-                <a:solidFill>
-                  <a:srgbClr val="FFFFFF"/>
-                </a:solidFill>
-              </a14:hiddenFill>
-            </a:ext>
-          </a:extLst>
         </p:spPr>
       </p:pic>
       <p:pic>
         <p:nvPicPr>
-          <p:cNvPr id="5123" name="Рисунок 1">
+          <p:cNvPr id="4" name="Рисунок 3">
             <a:extLst>
               <a:ext uri="{FF2B5EF4-FFF2-40B4-BE49-F238E27FC236}">
-                <a16:creationId xmlns:a16="http://schemas.microsoft.com/office/drawing/2014/main" id="{E403A63B-EE7E-1412-1DEE-C2F00AC57A56}"/>
+                <a16:creationId xmlns:a16="http://schemas.microsoft.com/office/drawing/2014/main" id="{17475FD5-8C51-C3A0-A554-457AC1F92D2F}"/>
               </a:ext>
             </a:extLst>
           </p:cNvPr>
           <p:cNvPicPr>
-            <a:picLocks noChangeAspect="1" noChangeArrowheads="1"/>
+            <a:picLocks noChangeAspect="1"/>
           </p:cNvPicPr>
           <p:nvPr/>
         </p:nvPicPr>
         <p:blipFill>
-          <a:blip r:embed="rId5">
-            <a:extLst>
-              <a:ext uri="{28A0092B-C50C-407E-A947-70E740481C1C}">
-                <a14:useLocalDpi xmlns:a14="http://schemas.microsoft.com/office/drawing/2010/main" val="0"/>
-              </a:ext>
-            </a:extLst>
-          </a:blip>
-          <a:srcRect/>
+          <a:blip r:embed="rId4"/>
+          <a:srcRect b="51269"/>
           <a:stretch>
             <a:fillRect/>
           </a:stretch>
         </p:blipFill>
-        <p:spPr bwMode="auto">
+        <p:spPr>
           <a:xfrm>
-            <a:off x="2921571" y="2106183"/>
-            <a:ext cx="3300855" cy="3009011"/>
+            <a:off x="1668788" y="3029884"/>
+            <a:ext cx="5806424" cy="1862304"/>
           </a:xfrm>
           <a:prstGeom prst="rect">
             <a:avLst/>
           </a:prstGeom>
-          <a:noFill/>
-          <a:ln w="9525">
+          <a:ln>
             <a:solidFill>
-              <a:srgbClr val="000000"/>
+              <a:schemeClr val="bg1">
+                <a:lumMod val="10000"/>
+              </a:schemeClr>
             </a:solidFill>
-            <a:miter lim="800000"/>
-            <a:headEnd/>
-            <a:tailEnd/>
           </a:ln>
-          <a:extLst>
-            <a:ext uri="{909E8E84-426E-40DD-AFC4-6F175D3DCCD1}">
-              <a14:hiddenFill xmlns:a14="http://schemas.microsoft.com/office/drawing/2010/main">
-                <a:solidFill>
-                  <a:srgbClr val="FFFFFF"/>
-                </a:solidFill>
-              </a14:hiddenFill>
-            </a:ext>
-          </a:extLst>
         </p:spPr>
       </p:pic>
     </p:spTree>
@@ -11498,22 +12356,14 @@
           </a:bodyPr>
           <a:lstStyle/>
           <a:p>
-            <a:pPr marL="0" lvl="0" indent="0" algn="l" rtl="0">
-              <a:spcBef>
-                <a:spcPts val="0"/>
-              </a:spcBef>
-              <a:spcAft>
-                <a:spcPts val="0"/>
-              </a:spcAft>
-              <a:buNone/>
-            </a:pPr>
+            <a:pPr lvl="0"/>
             <a:r>
               <a:rPr lang="ru-RU" sz="2000" dirty="0"/>
               <a:t>Таблица </a:t>
             </a:r>
             <a:r>
               <a:rPr lang="en-US" sz="2000" dirty="0"/>
-              <a:t>Treatment</a:t>
+              <a:t>students</a:t>
             </a:r>
             <a:endParaRPr sz="2000" dirty="0"/>
           </a:p>
@@ -11521,112 +12371,77 @@
       </p:sp>
       <p:pic>
         <p:nvPicPr>
-          <p:cNvPr id="6146" name="Рисунок 1">
+          <p:cNvPr id="2" name="Рисунок 1">
             <a:extLst>
               <a:ext uri="{FF2B5EF4-FFF2-40B4-BE49-F238E27FC236}">
-                <a16:creationId xmlns:a16="http://schemas.microsoft.com/office/drawing/2014/main" id="{FD50B1F8-D68E-56CB-EE7E-D1821355F7BC}"/>
+                <a16:creationId xmlns:a16="http://schemas.microsoft.com/office/drawing/2014/main" id="{391A4895-9146-4151-F1E7-CA3A80B68F4F}"/>
               </a:ext>
             </a:extLst>
           </p:cNvPr>
           <p:cNvPicPr>
-            <a:picLocks noChangeAspect="1" noChangeArrowheads="1"/>
+            <a:picLocks noChangeAspect="1"/>
           </p:cNvPicPr>
           <p:nvPr/>
         </p:nvPicPr>
         <p:blipFill>
-          <a:blip r:embed="rId3">
-            <a:extLst>
-              <a:ext uri="{28A0092B-C50C-407E-A947-70E740481C1C}">
-                <a14:useLocalDpi xmlns:a14="http://schemas.microsoft.com/office/drawing/2010/main" val="0"/>
-              </a:ext>
-            </a:extLst>
-          </a:blip>
-          <a:srcRect/>
+          <a:blip r:embed="rId3"/>
           <a:stretch>
             <a:fillRect/>
           </a:stretch>
         </p:blipFill>
-        <p:spPr bwMode="auto">
+        <p:spPr>
           <a:xfrm>
-            <a:off x="2002629" y="1106925"/>
-            <a:ext cx="5138737" cy="1879600"/>
+            <a:off x="2026397" y="929625"/>
+            <a:ext cx="4206763" cy="1869029"/>
           </a:xfrm>
           <a:prstGeom prst="rect">
             <a:avLst/>
           </a:prstGeom>
-          <a:noFill/>
-          <a:ln w="9525">
+          <a:ln>
             <a:solidFill>
-              <a:srgbClr val="000000"/>
+              <a:schemeClr val="bg1">
+                <a:lumMod val="10000"/>
+              </a:schemeClr>
             </a:solidFill>
-            <a:miter lim="800000"/>
-            <a:headEnd/>
-            <a:tailEnd/>
           </a:ln>
-          <a:extLst>
-            <a:ext uri="{909E8E84-426E-40DD-AFC4-6F175D3DCCD1}">
-              <a14:hiddenFill xmlns:a14="http://schemas.microsoft.com/office/drawing/2010/main">
-                <a:solidFill>
-                  <a:srgbClr val="FFFFFF"/>
-                </a:solidFill>
-              </a14:hiddenFill>
-            </a:ext>
-          </a:extLst>
         </p:spPr>
       </p:pic>
       <p:pic>
         <p:nvPicPr>
-          <p:cNvPr id="6147" name="Рисунок 1">
+          <p:cNvPr id="3" name="Рисунок 2">
             <a:extLst>
               <a:ext uri="{FF2B5EF4-FFF2-40B4-BE49-F238E27FC236}">
-                <a16:creationId xmlns:a16="http://schemas.microsoft.com/office/drawing/2014/main" id="{A4A6D26A-0928-A148-E385-C37C3D770CC0}"/>
+                <a16:creationId xmlns:a16="http://schemas.microsoft.com/office/drawing/2014/main" id="{4480F7B5-9299-7019-B96D-4C75F4F88E61}"/>
               </a:ext>
             </a:extLst>
           </p:cNvPr>
           <p:cNvPicPr>
-            <a:picLocks noChangeAspect="1" noChangeArrowheads="1"/>
+            <a:picLocks noChangeAspect="1"/>
           </p:cNvPicPr>
           <p:nvPr/>
         </p:nvPicPr>
         <p:blipFill>
-          <a:blip r:embed="rId4">
-            <a:extLst>
-              <a:ext uri="{28A0092B-C50C-407E-A947-70E740481C1C}">
-                <a14:useLocalDpi xmlns:a14="http://schemas.microsoft.com/office/drawing/2010/main" val="0"/>
-              </a:ext>
-            </a:extLst>
-          </a:blip>
-          <a:srcRect/>
+          <a:blip r:embed="rId4"/>
+          <a:srcRect b="42993"/>
           <a:stretch>
             <a:fillRect/>
           </a:stretch>
         </p:blipFill>
-        <p:spPr bwMode="auto">
+        <p:spPr>
           <a:xfrm>
-            <a:off x="1487486" y="3163825"/>
-            <a:ext cx="6169025" cy="1660525"/>
+            <a:off x="0" y="3042619"/>
+            <a:ext cx="9144000" cy="1291133"/>
           </a:xfrm>
           <a:prstGeom prst="rect">
             <a:avLst/>
           </a:prstGeom>
-          <a:noFill/>
-          <a:ln w="9525">
+          <a:ln>
             <a:solidFill>
-              <a:srgbClr val="000000"/>
+              <a:schemeClr val="bg1">
+                <a:lumMod val="10000"/>
+              </a:schemeClr>
             </a:solidFill>
-            <a:miter lim="800000"/>
-            <a:headEnd/>
-            <a:tailEnd/>
           </a:ln>
-          <a:extLst>
-            <a:ext uri="{909E8E84-426E-40DD-AFC4-6F175D3DCCD1}">
-              <a14:hiddenFill xmlns:a14="http://schemas.microsoft.com/office/drawing/2010/main">
-                <a:solidFill>
-                  <a:srgbClr val="FFFFFF"/>
-                </a:solidFill>
-              </a14:hiddenFill>
-            </a:ext>
-          </a:extLst>
         </p:spPr>
       </p:pic>
     </p:spTree>
@@ -12478,90 +13293,4 @@
   <a:objectDefaults/>
   <a:extraClrSchemeLst/>
 </a:theme>
-</file>
-
-<file path=ppt/theme/themeOverride1.xml><?xml version="1.0" encoding="utf-8"?>
-<a:themeOverride xmlns:a="http://schemas.openxmlformats.org/drawingml/2006/main">
-  <a:clrScheme name="Office">
-    <a:dk1>
-      <a:srgbClr val="333333"/>
-    </a:dk1>
-    <a:lt1>
-      <a:srgbClr val="F8F8F8"/>
-    </a:lt1>
-    <a:dk2>
-      <a:srgbClr val="1F497D"/>
-    </a:dk2>
-    <a:lt2>
-      <a:srgbClr val="EEECE1"/>
-    </a:lt2>
-    <a:accent1>
-      <a:srgbClr val="6ABFE2"/>
-    </a:accent1>
-    <a:accent2>
-      <a:srgbClr val="E0B8AE"/>
-    </a:accent2>
-    <a:accent3>
-      <a:srgbClr val="BEBEBE"/>
-    </a:accent3>
-    <a:accent4>
-      <a:srgbClr val="A39299"/>
-    </a:accent4>
-    <a:accent5>
-      <a:srgbClr val="4BACC6"/>
-    </a:accent5>
-    <a:accent6>
-      <a:srgbClr val="F79646"/>
-    </a:accent6>
-    <a:hlink>
-      <a:srgbClr val="0000FF"/>
-    </a:hlink>
-    <a:folHlink>
-      <a:srgbClr val="800080"/>
-    </a:folHlink>
-  </a:clrScheme>
-</a:themeOverride>
-</file>
-
-<file path=ppt/theme/themeOverride2.xml><?xml version="1.0" encoding="utf-8"?>
-<a:themeOverride xmlns:a="http://schemas.openxmlformats.org/drawingml/2006/main">
-  <a:clrScheme name="Office">
-    <a:dk1>
-      <a:srgbClr val="333333"/>
-    </a:dk1>
-    <a:lt1>
-      <a:srgbClr val="F8F8F8"/>
-    </a:lt1>
-    <a:dk2>
-      <a:srgbClr val="1F497D"/>
-    </a:dk2>
-    <a:lt2>
-      <a:srgbClr val="EEECE1"/>
-    </a:lt2>
-    <a:accent1>
-      <a:srgbClr val="6ABFE2"/>
-    </a:accent1>
-    <a:accent2>
-      <a:srgbClr val="E0B8AE"/>
-    </a:accent2>
-    <a:accent3>
-      <a:srgbClr val="BEBEBE"/>
-    </a:accent3>
-    <a:accent4>
-      <a:srgbClr val="A39299"/>
-    </a:accent4>
-    <a:accent5>
-      <a:srgbClr val="4BACC6"/>
-    </a:accent5>
-    <a:accent6>
-      <a:srgbClr val="F79646"/>
-    </a:accent6>
-    <a:hlink>
-      <a:srgbClr val="0000FF"/>
-    </a:hlink>
-    <a:folHlink>
-      <a:srgbClr val="800080"/>
-    </a:folHlink>
-  </a:clrScheme>
-</a:themeOverride>
 </file>